--- a/01 Elementi Razvoja Softvera/02 Prezentacije/PPTX/07_MCP.pptx
+++ b/01 Elementi Razvoja Softvera/02 Prezentacije/PPTX/07_MCP.pptx
@@ -6525,50 +6525,6 @@
               </a:rPr>
               <a:t>,</a:t>
             </a:r>
-            <a:r>
-              <a:rPr sz="1049">
-                <a:solidFill>
-                  <a:srgbClr val="262B36"/>
-                </a:solidFill>
-                <a:latin typeface="Consolas"/>
-                <a:ea typeface="Consolas"/>
-                <a:cs typeface="Consolas"/>
-              </a:rPr>
-              <a:t> </a:t>
-            </a:r>
-            <a:r>
-              <a:rPr sz="1049" b="1">
-                <a:solidFill>
-                  <a:srgbClr val="7442C8"/>
-                </a:solidFill>
-                <a:latin typeface="Consolas"/>
-                <a:ea typeface="Consolas"/>
-                <a:cs typeface="Consolas"/>
-              </a:rPr>
-              <a:t>ReadOnly</a:t>
-            </a:r>
-            <a:r>
-              <a:rPr sz="1049">
-                <a:solidFill>
-                  <a:srgbClr val="262B36"/>
-                </a:solidFill>
-                <a:latin typeface="Consolas"/>
-                <a:ea typeface="Consolas"/>
-                <a:cs typeface="Consolas"/>
-              </a:rPr>
-              <a:t> </a:t>
-            </a:r>
-            <a:r>
-              <a:rPr sz="1049">
-                <a:solidFill>
-                  <a:srgbClr val="5C6574"/>
-                </a:solidFill>
-                <a:latin typeface="Consolas"/>
-                <a:ea typeface="Consolas"/>
-                <a:cs typeface="Consolas"/>
-              </a:rPr>
-              <a:t>=</a:t>
-            </a:r>
           </a:p>
           <a:p xmlns:a="http://schemas.openxmlformats.org/drawingml/2006/main">
             <a:pPr>
@@ -6608,6 +6564,127 @@
             <a:r>
               <a:rPr sz="1049" b="1">
                 <a:solidFill>
+                  <a:srgbClr val="7442C8"/>
+                </a:solidFill>
+                <a:latin typeface="Consolas"/>
+                <a:ea typeface="Consolas"/>
+                <a:cs typeface="Consolas"/>
+              </a:rPr>
+              <a:t>ReadOnly</a:t>
+            </a:r>
+            <a:r>
+              <a:rPr sz="1049">
+                <a:solidFill>
+                  <a:srgbClr val="262B36"/>
+                </a:solidFill>
+                <a:latin typeface="Consolas"/>
+                <a:ea typeface="Consolas"/>
+                <a:cs typeface="Consolas"/>
+              </a:rPr>
+              <a:t> </a:t>
+            </a:r>
+            <a:r>
+              <a:rPr sz="1049">
+                <a:solidFill>
+                  <a:srgbClr val="5C6574"/>
+                </a:solidFill>
+                <a:latin typeface="Consolas"/>
+                <a:ea typeface="Consolas"/>
+                <a:cs typeface="Consolas"/>
+              </a:rPr>
+              <a:t>=</a:t>
+            </a:r>
+            <a:r>
+              <a:rPr sz="1049">
+                <a:solidFill>
+                  <a:srgbClr val="262B36"/>
+                </a:solidFill>
+                <a:latin typeface="Consolas"/>
+                <a:ea typeface="Consolas"/>
+                <a:cs typeface="Consolas"/>
+              </a:rPr>
+              <a:t> </a:t>
+            </a:r>
+            <a:r>
+              <a:rPr sz="1049" b="1">
+                <a:solidFill>
+                  <a:srgbClr val="005CC5"/>
+                </a:solidFill>
+                <a:latin typeface="Consolas"/>
+                <a:ea typeface="Consolas"/>
+                <a:cs typeface="Consolas"/>
+              </a:rPr>
+              <a:t>true</a:t>
+            </a:r>
+            <a:r>
+              <a:rPr sz="1049">
+                <a:solidFill>
+                  <a:srgbClr val="5C6574"/>
+                </a:solidFill>
+                <a:latin typeface="Consolas"/>
+                <a:ea typeface="Consolas"/>
+                <a:cs typeface="Consolas"/>
+              </a:rPr>
+              <a:t>,</a:t>
+            </a:r>
+            <a:r>
+              <a:rPr sz="1049">
+                <a:solidFill>
+                  <a:srgbClr val="262B36"/>
+                </a:solidFill>
+                <a:latin typeface="Consolas"/>
+                <a:ea typeface="Consolas"/>
+                <a:cs typeface="Consolas"/>
+              </a:rPr>
+              <a:t> </a:t>
+            </a:r>
+            <a:r>
+              <a:rPr sz="1049" b="1">
+                <a:solidFill>
+                  <a:srgbClr val="7442C8"/>
+                </a:solidFill>
+                <a:latin typeface="Consolas"/>
+                <a:ea typeface="Consolas"/>
+                <a:cs typeface="Consolas"/>
+              </a:rPr>
+              <a:t>Idempotent</a:t>
+            </a:r>
+            <a:r>
+              <a:rPr sz="1049">
+                <a:solidFill>
+                  <a:srgbClr val="262B36"/>
+                </a:solidFill>
+                <a:latin typeface="Consolas"/>
+                <a:ea typeface="Consolas"/>
+                <a:cs typeface="Consolas"/>
+              </a:rPr>
+              <a:t> </a:t>
+            </a:r>
+            <a:r>
+              <a:rPr sz="1049">
+                <a:solidFill>
+                  <a:srgbClr val="5C6574"/>
+                </a:solidFill>
+                <a:latin typeface="Consolas"/>
+                <a:ea typeface="Consolas"/>
+                <a:cs typeface="Consolas"/>
+              </a:rPr>
+              <a:t>=</a:t>
+            </a:r>
+            <a:r>
+              <a:rPr sz="1049">
+                <a:solidFill>
+                  <a:srgbClr val="262B36"/>
+                </a:solidFill>
+                <a:latin typeface="Consolas"/>
+                <a:ea typeface="Consolas"/>
+                <a:cs typeface="Consolas"/>
+              </a:rPr>
+              <a:t> </a:t>
+            </a:r>
+            <a:r>
+              <a:rPr sz="1049" b="1">
+                <a:solidFill>
                   <a:srgbClr val="005CC5"/>
                 </a:solidFill>
                 <a:latin typeface="Consolas"/>
@@ -6740,28 +6817,6 @@
               </a:rPr>
               <a:t>=&gt;</a:t>
             </a:r>
-            <a:r>
-              <a:rPr sz="1049">
-                <a:solidFill>
-                  <a:srgbClr val="262B36"/>
-                </a:solidFill>
-                <a:latin typeface="Consolas"/>
-                <a:ea typeface="Consolas"/>
-                <a:cs typeface="Consolas"/>
-              </a:rPr>
-              <a:t> workspace</a:t>
-            </a:r>
-            <a:r>
-              <a:rPr sz="1049">
-                <a:solidFill>
-                  <a:srgbClr val="5C6574"/>
-                </a:solidFill>
-                <a:latin typeface="Consolas"/>
-                <a:ea typeface="Consolas"/>
-                <a:cs typeface="Consolas"/>
-              </a:rPr>
-              <a:t>.</a:t>
-            </a:r>
           </a:p>
           <a:p xmlns:a="http://schemas.openxmlformats.org/drawingml/2006/main">
             <a:pPr>
@@ -6801,13 +6856,35 @@
             <a:r>
               <a:rPr sz="1049" b="1">
                 <a:solidFill>
+                  <a:srgbClr val="005CC5"/>
+                </a:solidFill>
+                <a:latin typeface="Consolas"/>
+                <a:ea typeface="Consolas"/>
+                <a:cs typeface="Consolas"/>
+              </a:rPr>
+              <a:t>string</a:t>
+            </a:r>
+            <a:r>
+              <a:rPr sz="1049">
+                <a:solidFill>
+                  <a:srgbClr val="5C6574"/>
+                </a:solidFill>
+                <a:latin typeface="Consolas"/>
+                <a:ea typeface="Consolas"/>
+                <a:cs typeface="Consolas"/>
+              </a:rPr>
+              <a:t>.</a:t>
+            </a:r>
+            <a:r>
+              <a:rPr sz="1049" b="1">
+                <a:solidFill>
                   <a:srgbClr val="7442C8"/>
                 </a:solidFill>
                 <a:latin typeface="Consolas"/>
                 <a:ea typeface="Consolas"/>
                 <a:cs typeface="Consolas"/>
               </a:rPr>
-              <a:t>GetStructure</a:t>
+              <a:t>Join</a:t>
             </a:r>
             <a:r>
               <a:rPr sz="1049">
@@ -6818,7 +6895,84 @@
                 <a:ea typeface="Consolas"/>
                 <a:cs typeface="Consolas"/>
               </a:rPr>
-              <a:t>();</a:t>
+              <a:t>(</a:t>
+            </a:r>
+            <a:r>
+              <a:rPr sz="1049">
+                <a:solidFill>
+                  <a:srgbClr val="A95921"/>
+                </a:solidFill>
+                <a:latin typeface="Consolas"/>
+                <a:ea typeface="Consolas"/>
+                <a:cs typeface="Consolas"/>
+              </a:rPr>
+              <a:t>'\n'</a:t>
+            </a:r>
+            <a:r>
+              <a:rPr sz="1049">
+                <a:solidFill>
+                  <a:srgbClr val="5C6574"/>
+                </a:solidFill>
+                <a:latin typeface="Consolas"/>
+                <a:ea typeface="Consolas"/>
+                <a:cs typeface="Consolas"/>
+              </a:rPr>
+              <a:t>,</a:t>
+            </a:r>
+            <a:r>
+              <a:rPr sz="1049">
+                <a:solidFill>
+                  <a:srgbClr val="262B36"/>
+                </a:solidFill>
+                <a:latin typeface="Consolas"/>
+                <a:ea typeface="Consolas"/>
+                <a:cs typeface="Consolas"/>
+              </a:rPr>
+              <a:t> </a:t>
+            </a:r>
+            <a:r>
+              <a:rPr sz="1049">
+                <a:solidFill>
+                  <a:srgbClr val="262B36"/>
+                </a:solidFill>
+                <a:latin typeface="Consolas"/>
+                <a:ea typeface="Consolas"/>
+                <a:cs typeface="Consolas"/>
+              </a:rPr>
+              <a:t>structure</a:t>
+            </a:r>
+            <a:r>
+              <a:rPr sz="1049">
+                <a:solidFill>
+                  <a:srgbClr val="5C6574"/>
+                </a:solidFill>
+                <a:latin typeface="Consolas"/>
+                <a:ea typeface="Consolas"/>
+                <a:cs typeface="Consolas"/>
+              </a:rPr>
+              <a:t>.</a:t>
+            </a:r>
+            <a:r>
+              <a:rPr sz="1049" b="1">
+                <a:solidFill>
+                  <a:srgbClr val="7442C8"/>
+                </a:solidFill>
+                <a:latin typeface="Consolas"/>
+                <a:ea typeface="Consolas"/>
+                <a:cs typeface="Consolas"/>
+              </a:rPr>
+              <a:t>ListFiles</a:t>
+            </a:r>
+            <a:r>
+              <a:rPr sz="1049">
+                <a:solidFill>
+                  <a:srgbClr val="5C6574"/>
+                </a:solidFill>
+                <a:latin typeface="Consolas"/>
+                <a:ea typeface="Consolas"/>
+                <a:cs typeface="Consolas"/>
+              </a:rPr>
+              <a:t>());</a:t>
             </a:r>
           </a:p>
           <a:p xmlns:a="http://schemas.openxmlformats.org/drawingml/2006/main">
@@ -7118,13 +7272,35 @@
             <a:r>
               <a:rPr sz="1049" b="1">
                 <a:solidFill>
+                  <a:srgbClr val="7442C8"/>
+                </a:solidFill>
+                <a:latin typeface="Consolas"/>
+                <a:ea typeface="Consolas"/>
+                <a:cs typeface="Consolas"/>
+              </a:rPr>
+              <a:t>Task</a:t>
+            </a:r>
+            <a:r>
+              <a:rPr sz="1049">
+                <a:solidFill>
+                  <a:srgbClr val="5C6574"/>
+                </a:solidFill>
+                <a:latin typeface="Consolas"/>
+                <a:ea typeface="Consolas"/>
+                <a:cs typeface="Consolas"/>
+              </a:rPr>
+              <a:t>&lt;</a:t>
+            </a:r>
+            <a:r>
+              <a:rPr sz="1049" b="1">
+                <a:solidFill>
                   <a:srgbClr val="005CC5"/>
                 </a:solidFill>
                 <a:latin typeface="Consolas"/>
                 <a:ea typeface="Consolas"/>
                 <a:cs typeface="Consolas"/>
               </a:rPr>
-              <a:t>Task</a:t>
+              <a:t>string</a:t>
             </a:r>
             <a:r>
               <a:rPr sz="1049">
@@ -7135,18 +7311,29 @@
                 <a:ea typeface="Consolas"/>
                 <a:cs typeface="Consolas"/>
               </a:rPr>
-              <a:t>&lt;</a:t>
+              <a:t>&gt;</a:t>
+            </a:r>
+            <a:r>
+              <a:rPr sz="1049">
+                <a:solidFill>
+                  <a:srgbClr val="262B36"/>
+                </a:solidFill>
+                <a:latin typeface="Consolas"/>
+                <a:ea typeface="Consolas"/>
+                <a:cs typeface="Consolas"/>
+              </a:rPr>
+              <a:t> </a:t>
             </a:r>
             <a:r>
               <a:rPr sz="1049" b="1">
                 <a:solidFill>
-                  <a:srgbClr val="005CC5"/>
-                </a:solidFill>
-                <a:latin typeface="Consolas"/>
-                <a:ea typeface="Consolas"/>
-                <a:cs typeface="Consolas"/>
-              </a:rPr>
-              <a:t>string</a:t>
+                  <a:srgbClr val="7442C8"/>
+                </a:solidFill>
+                <a:latin typeface="Consolas"/>
+                <a:ea typeface="Consolas"/>
+                <a:cs typeface="Consolas"/>
+              </a:rPr>
+              <a:t>GetGitDiff</a:t>
             </a:r>
             <a:r>
               <a:rPr sz="1049">
@@ -7157,7 +7344,18 @@
                 <a:ea typeface="Consolas"/>
                 <a:cs typeface="Consolas"/>
               </a:rPr>
-              <a:t>&gt;</a:t>
+              <a:t>(</a:t>
+            </a:r>
+            <a:r>
+              <a:rPr sz="1049" b="1">
+                <a:solidFill>
+                  <a:srgbClr val="7442C8"/>
+                </a:solidFill>
+                <a:latin typeface="Consolas"/>
+                <a:ea typeface="Consolas"/>
+                <a:cs typeface="Consolas"/>
+              </a:rPr>
+              <a:t>CancellationToken</a:t>
             </a:r>
             <a:r>
               <a:rPr sz="1049">
@@ -7171,48 +7369,15 @@
               <a:t> </a:t>
             </a:r>
             <a:r>
-              <a:rPr sz="1049" b="1">
-                <a:solidFill>
-                  <a:srgbClr val="7442C8"/>
-                </a:solidFill>
-                <a:latin typeface="Consolas"/>
-                <a:ea typeface="Consolas"/>
-                <a:cs typeface="Consolas"/>
-              </a:rPr>
-              <a:t>GetGitDiff</a:t>
-            </a:r>
-            <a:r>
               <a:rPr sz="1049">
                 <a:solidFill>
-                  <a:srgbClr val="5C6574"/>
-                </a:solidFill>
-                <a:latin typeface="Consolas"/>
-                <a:ea typeface="Consolas"/>
-                <a:cs typeface="Consolas"/>
-              </a:rPr>
-              <a:t>(</a:t>
-            </a:r>
-            <a:r>
-              <a:rPr sz="1049" b="1">
-                <a:solidFill>
-                  <a:srgbClr val="005CC5"/>
-                </a:solidFill>
-                <a:latin typeface="Consolas"/>
-                <a:ea typeface="Consolas"/>
-                <a:cs typeface="Consolas"/>
-              </a:rPr>
-              <a:t>CancellationToken</a:t>
-            </a:r>
-            <a:r>
-              <a:rPr sz="1049">
-                <a:solidFill>
                   <a:srgbClr val="262B36"/>
                 </a:solidFill>
                 <a:latin typeface="Consolas"/>
                 <a:ea typeface="Consolas"/>
                 <a:cs typeface="Consolas"/>
               </a:rPr>
-              <a:t> ct</a:t>
+              <a:t>ct</a:t>
             </a:r>
             <a:r>
               <a:rPr sz="1049">
@@ -7317,11 +7482,33 @@
                 <a:ea typeface="Consolas"/>
                 <a:cs typeface="Consolas"/>
               </a:rPr>
-              <a:t> result </a:t>
+              <a:t> </a:t>
             </a:r>
             <a:r>
               <a:rPr sz="1049">
                 <a:solidFill>
+                  <a:srgbClr val="262B36"/>
+                </a:solidFill>
+                <a:latin typeface="Consolas"/>
+                <a:ea typeface="Consolas"/>
+                <a:cs typeface="Consolas"/>
+              </a:rPr>
+              <a:t>result</a:t>
+            </a:r>
+            <a:r>
+              <a:rPr sz="1049">
+                <a:solidFill>
+                  <a:srgbClr val="262B36"/>
+                </a:solidFill>
+                <a:latin typeface="Consolas"/>
+                <a:ea typeface="Consolas"/>
+                <a:cs typeface="Consolas"/>
+              </a:rPr>
+              <a:t> </a:t>
+            </a:r>
+            <a:r>
+              <a:rPr sz="1049">
+                <a:solidFill>
                   <a:srgbClr val="5C6574"/>
                 </a:solidFill>
                 <a:latin typeface="Consolas"/>
@@ -7361,11 +7548,22 @@
                 <a:ea typeface="Consolas"/>
                 <a:cs typeface="Consolas"/>
               </a:rPr>
-              <a:t> workspace</a:t>
+              <a:t> </a:t>
             </a:r>
             <a:r>
               <a:rPr sz="1049">
                 <a:solidFill>
+                  <a:srgbClr val="262B36"/>
+                </a:solidFill>
+                <a:latin typeface="Consolas"/>
+                <a:ea typeface="Consolas"/>
+                <a:cs typeface="Consolas"/>
+              </a:rPr>
+              <a:t>commands</a:t>
+            </a:r>
+            <a:r>
+              <a:rPr sz="1049">
+                <a:solidFill>
                   <a:srgbClr val="5C6574"/>
                 </a:solidFill>
                 <a:latin typeface="Consolas"/>
@@ -7383,7 +7581,7 @@
                 <a:ea typeface="Consolas"/>
                 <a:cs typeface="Consolas"/>
               </a:rPr>
-              <a:t>RunFixedCommandAsync</a:t>
+              <a:t>RunAsync</a:t>
             </a:r>
             <a:r>
               <a:rPr sz="1049">
@@ -7433,15 +7631,37 @@
               <a:t>      </a:t>
             </a:r>
             <a:r>
+              <a:rPr sz="1049" b="1">
+                <a:solidFill>
+                  <a:srgbClr val="7442C8"/>
+                </a:solidFill>
+                <a:latin typeface="Consolas"/>
+                <a:ea typeface="Consolas"/>
+                <a:cs typeface="Consolas"/>
+              </a:rPr>
+              <a:t>ProjectCommand</a:t>
+            </a:r>
+            <a:r>
               <a:rPr sz="1049">
                 <a:solidFill>
-                  <a:srgbClr val="A95921"/>
-                </a:solidFill>
-                <a:latin typeface="Consolas"/>
-                <a:ea typeface="Consolas"/>
-                <a:cs typeface="Consolas"/>
-              </a:rPr>
-              <a:t>"git"</a:t>
+                  <a:srgbClr val="5C6574"/>
+                </a:solidFill>
+                <a:latin typeface="Consolas"/>
+                <a:ea typeface="Consolas"/>
+                <a:cs typeface="Consolas"/>
+              </a:rPr>
+              <a:t>.</a:t>
+            </a:r>
+            <a:r>
+              <a:rPr sz="1049" b="1">
+                <a:solidFill>
+                  <a:srgbClr val="7442C8"/>
+                </a:solidFill>
+                <a:latin typeface="Consolas"/>
+                <a:ea typeface="Consolas"/>
+                <a:cs typeface="Consolas"/>
+              </a:rPr>
+              <a:t>GitDiff</a:t>
             </a:r>
             <a:r>
               <a:rPr sz="1049">
@@ -7468,112 +7688,13 @@
             <a:r>
               <a:rPr sz="1049">
                 <a:solidFill>
-                  <a:srgbClr val="5C6574"/>
-                </a:solidFill>
-                <a:latin typeface="Consolas"/>
-                <a:ea typeface="Consolas"/>
-                <a:cs typeface="Consolas"/>
-              </a:rPr>
-              <a:t>[</a:t>
-            </a:r>
-            <a:r>
-              <a:rPr sz="1049">
-                <a:solidFill>
-                  <a:srgbClr val="A95921"/>
-                </a:solidFill>
-                <a:latin typeface="Consolas"/>
-                <a:ea typeface="Consolas"/>
-                <a:cs typeface="Consolas"/>
-              </a:rPr>
-              <a:t>"diff"</a:t>
-            </a:r>
-            <a:r>
-              <a:rPr sz="1049">
-                <a:solidFill>
-                  <a:srgbClr val="5C6574"/>
-                </a:solidFill>
-                <a:latin typeface="Consolas"/>
-                <a:ea typeface="Consolas"/>
-                <a:cs typeface="Consolas"/>
-              </a:rPr>
-              <a:t>,</a:t>
-            </a:r>
-            <a:r>
-              <a:rPr sz="1049">
-                <a:solidFill>
                   <a:srgbClr val="262B36"/>
                 </a:solidFill>
                 <a:latin typeface="Consolas"/>
                 <a:ea typeface="Consolas"/>
                 <a:cs typeface="Consolas"/>
               </a:rPr>
-              <a:t> </a:t>
-            </a:r>
-            <a:r>
-              <a:rPr sz="1049">
-                <a:solidFill>
-                  <a:srgbClr val="A95921"/>
-                </a:solidFill>
-                <a:latin typeface="Consolas"/>
-                <a:ea typeface="Consolas"/>
-                <a:cs typeface="Consolas"/>
-              </a:rPr>
-              <a:t>"--"</a:t>
-            </a:r>
-            <a:r>
-              <a:rPr sz="1049">
-                <a:solidFill>
-                  <a:srgbClr val="5C6574"/>
-                </a:solidFill>
-                <a:latin typeface="Consolas"/>
-                <a:ea typeface="Consolas"/>
-                <a:cs typeface="Consolas"/>
-              </a:rPr>
-              <a:t>,</a:t>
-            </a:r>
-            <a:r>
-              <a:rPr sz="1049">
-                <a:solidFill>
-                  <a:srgbClr val="262B36"/>
-                </a:solidFill>
-                <a:latin typeface="Consolas"/>
-                <a:ea typeface="Consolas"/>
-                <a:cs typeface="Consolas"/>
-              </a:rPr>
-              <a:t> </a:t>
-            </a:r>
-            <a:r>
-              <a:rPr sz="1049">
-                <a:solidFill>
-                  <a:srgbClr val="A95921"/>
-                </a:solidFill>
-                <a:latin typeface="Consolas"/>
-                <a:ea typeface="Consolas"/>
-                <a:cs typeface="Consolas"/>
-              </a:rPr>
-              <a:t>"."</a:t>
-            </a:r>
-            <a:r>
-              <a:rPr sz="1049">
-                <a:solidFill>
-                  <a:srgbClr val="5C6574"/>
-                </a:solidFill>
-                <a:latin typeface="Consolas"/>
-                <a:ea typeface="Consolas"/>
-                <a:cs typeface="Consolas"/>
-              </a:rPr>
-              <a:t>],</a:t>
-            </a:r>
-            <a:r>
-              <a:rPr sz="1049">
-                <a:solidFill>
-                  <a:srgbClr val="262B36"/>
-                </a:solidFill>
-                <a:latin typeface="Consolas"/>
-                <a:ea typeface="Consolas"/>
-                <a:cs typeface="Consolas"/>
-              </a:rPr>
-              <a:t> ct</a:t>
+              <a:t>ct</a:t>
             </a:r>
             <a:r>
               <a:rPr sz="1049">
@@ -7642,7 +7763,18 @@
                 <a:ea typeface="Consolas"/>
                 <a:cs typeface="Consolas"/>
               </a:rPr>
-              <a:t> workspace</a:t>
+              <a:t> </a:t>
+            </a:r>
+            <a:r>
+              <a:rPr sz="1049" b="1">
+                <a:solidFill>
+                  <a:srgbClr val="7442C8"/>
+                </a:solidFill>
+                <a:latin typeface="Consolas"/>
+                <a:ea typeface="Consolas"/>
+                <a:cs typeface="Consolas"/>
+              </a:rPr>
+              <a:t>ToolResultJson</a:t>
             </a:r>
             <a:r>
               <a:rPr sz="1049">
@@ -7664,7 +7796,7 @@
                 <a:ea typeface="Consolas"/>
                 <a:cs typeface="Consolas"/>
               </a:rPr>
-              <a:t>ToJson</a:t>
+              <a:t>Serialize</a:t>
             </a:r>
             <a:r>
               <a:rPr sz="1049">
@@ -7676,94 +7808,6 @@
                 <a:cs typeface="Consolas"/>
               </a:rPr>
               <a:t>(</a:t>
-            </a:r>
-            <a:r>
-              <a:rPr sz="1049" b="1">
-                <a:solidFill>
-                  <a:srgbClr val="005CC5"/>
-                </a:solidFill>
-                <a:latin typeface="Consolas"/>
-                <a:ea typeface="Consolas"/>
-                <a:cs typeface="Consolas"/>
-              </a:rPr>
-              <a:t>new</a:t>
-            </a:r>
-            <a:r>
-              <a:rPr sz="1049">
-                <a:solidFill>
-                  <a:srgbClr val="262B36"/>
-                </a:solidFill>
-                <a:latin typeface="Consolas"/>
-                <a:ea typeface="Consolas"/>
-                <a:cs typeface="Consolas"/>
-              </a:rPr>
-              <a:t> </a:t>
-            </a:r>
-            <a:r>
-              <a:rPr sz="1049">
-                <a:solidFill>
-                  <a:srgbClr val="5C6574"/>
-                </a:solidFill>
-                <a:latin typeface="Consolas"/>
-                <a:ea typeface="Consolas"/>
-                <a:cs typeface="Consolas"/>
-              </a:rPr>
-              <a:t>{</a:t>
-            </a:r>
-            <a:r>
-              <a:rPr sz="1049">
-                <a:solidFill>
-                  <a:srgbClr val="262B36"/>
-                </a:solidFill>
-                <a:latin typeface="Consolas"/>
-                <a:ea typeface="Consolas"/>
-                <a:cs typeface="Consolas"/>
-              </a:rPr>
-              <a:t> success </a:t>
-            </a:r>
-            <a:r>
-              <a:rPr sz="1049">
-                <a:solidFill>
-                  <a:srgbClr val="5C6574"/>
-                </a:solidFill>
-                <a:latin typeface="Consolas"/>
-                <a:ea typeface="Consolas"/>
-                <a:cs typeface="Consolas"/>
-              </a:rPr>
-              <a:t>=</a:t>
-            </a:r>
-            <a:r>
-              <a:rPr sz="1049">
-                <a:solidFill>
-                  <a:srgbClr val="262B36"/>
-                </a:solidFill>
-                <a:latin typeface="Consolas"/>
-                <a:ea typeface="Consolas"/>
-                <a:cs typeface="Consolas"/>
-              </a:rPr>
-              <a:t> result</a:t>
-            </a:r>
-            <a:r>
-              <a:rPr sz="1049">
-                <a:solidFill>
-                  <a:srgbClr val="5C6574"/>
-                </a:solidFill>
-                <a:latin typeface="Consolas"/>
-                <a:ea typeface="Consolas"/>
-                <a:cs typeface="Consolas"/>
-              </a:rPr>
-              <a:t>.</a:t>
-            </a:r>
-            <a:r>
-              <a:rPr sz="1049" b="1">
-                <a:solidFill>
-                  <a:srgbClr val="7442C8"/>
-                </a:solidFill>
-                <a:latin typeface="Consolas"/>
-                <a:ea typeface="Consolas"/>
-                <a:cs typeface="Consolas"/>
-              </a:rPr>
-              <a:t>ExitCode</a:t>
             </a:r>
           </a:p>
           <a:p xmlns:a="http://schemas.openxmlformats.org/drawingml/2006/main">
@@ -7802,6 +7846,17 @@
               <a:t>      </a:t>
             </a:r>
             <a:r>
+              <a:rPr sz="1049" b="1">
+                <a:solidFill>
+                  <a:srgbClr val="7442C8"/>
+                </a:solidFill>
+                <a:latin typeface="Consolas"/>
+                <a:ea typeface="Consolas"/>
+                <a:cs typeface="Consolas"/>
+              </a:rPr>
+              <a:t>GitDiffToolResult</a:t>
+            </a:r>
+            <a:r>
               <a:rPr sz="1049">
                 <a:solidFill>
                   <a:srgbClr val="5C6574"/>
@@ -7810,95 +7865,51 @@
                 <a:ea typeface="Consolas"/>
                 <a:cs typeface="Consolas"/>
               </a:rPr>
-              <a:t>==</a:t>
+              <a:t>.</a:t>
+            </a:r>
+            <a:r>
+              <a:rPr sz="1049" b="1">
+                <a:solidFill>
+                  <a:srgbClr val="7442C8"/>
+                </a:solidFill>
+                <a:latin typeface="Consolas"/>
+                <a:ea typeface="Consolas"/>
+                <a:cs typeface="Consolas"/>
+              </a:rPr>
+              <a:t>From</a:t>
             </a:r>
             <a:r>
               <a:rPr sz="1049">
                 <a:solidFill>
+                  <a:srgbClr val="5C6574"/>
+                </a:solidFill>
+                <a:latin typeface="Consolas"/>
+                <a:ea typeface="Consolas"/>
+                <a:cs typeface="Consolas"/>
+              </a:rPr>
+              <a:t>(</a:t>
+            </a:r>
+            <a:r>
+              <a:rPr sz="1049">
+                <a:solidFill>
                   <a:srgbClr val="262B36"/>
                 </a:solidFill>
                 <a:latin typeface="Consolas"/>
                 <a:ea typeface="Consolas"/>
                 <a:cs typeface="Consolas"/>
               </a:rPr>
-              <a:t> </a:t>
+              <a:t>result</a:t>
             </a:r>
             <a:r>
               <a:rPr sz="1049">
                 <a:solidFill>
-                  <a:srgbClr val="197373"/>
-                </a:solidFill>
-                <a:latin typeface="Consolas"/>
-                <a:ea typeface="Consolas"/>
-                <a:cs typeface="Consolas"/>
-              </a:rPr>
-              <a:t>0</a:t>
-            </a:r>
-            <a:r>
-              <a:rPr sz="1049">
-                <a:solidFill>
                   <a:srgbClr val="5C6574"/>
                 </a:solidFill>
                 <a:latin typeface="Consolas"/>
                 <a:ea typeface="Consolas"/>
                 <a:cs typeface="Consolas"/>
               </a:rPr>
-              <a:t>,</a:t>
-            </a:r>
-            <a:r>
-              <a:rPr sz="1049">
-                <a:solidFill>
-                  <a:srgbClr val="262B36"/>
-                </a:solidFill>
-                <a:latin typeface="Consolas"/>
-                <a:ea typeface="Consolas"/>
-                <a:cs typeface="Consolas"/>
-              </a:rPr>
-              <a:t> result</a:t>
-            </a:r>
-            <a:r>
-              <a:rPr sz="1049">
-                <a:solidFill>
-                  <a:srgbClr val="5C6574"/>
-                </a:solidFill>
-                <a:latin typeface="Consolas"/>
-                <a:ea typeface="Consolas"/>
-                <a:cs typeface="Consolas"/>
-              </a:rPr>
-              <a:t>.</a:t>
-            </a:r>
-            <a:r>
-              <a:rPr sz="1049" b="1">
-                <a:solidFill>
-                  <a:srgbClr val="7442C8"/>
-                </a:solidFill>
-                <a:latin typeface="Consolas"/>
-                <a:ea typeface="Consolas"/>
-                <a:cs typeface="Consolas"/>
-              </a:rPr>
-              <a:t>ExitCode</a:t>
-            </a:r>
-            <a:r>
-              <a:rPr sz="1049">
-                <a:solidFill>
-                  <a:srgbClr val="262B36"/>
-                </a:solidFill>
-                <a:latin typeface="Consolas"/>
-                <a:ea typeface="Consolas"/>
-                <a:cs typeface="Consolas"/>
-              </a:rPr>
-              <a:t> </a:t>
-            </a:r>
-            <a:r>
-              <a:rPr sz="1049">
-                <a:solidFill>
-                  <a:srgbClr val="5C6574"/>
-                </a:solidFill>
-                <a:latin typeface="Consolas"/>
-                <a:ea typeface="Consolas"/>
-                <a:cs typeface="Consolas"/>
-              </a:rPr>
-              <a:t>});</a:t>
+              <a:t>));</a:t>
             </a:r>
           </a:p>
           <a:p xmlns:a="http://schemas.openxmlformats.org/drawingml/2006/main">
@@ -10053,6 +10064,39 @@
               </a:rPr>
               <a:t>=</a:t>
             </a:r>
+            <a:r>
+              <a:rPr sz="1066">
+                <a:solidFill>
+                  <a:srgbClr val="262B36"/>
+                </a:solidFill>
+                <a:latin typeface="Consolas"/>
+                <a:ea typeface="Consolas"/>
+                <a:cs typeface="Consolas"/>
+              </a:rPr>
+              <a:t> </a:t>
+            </a:r>
+            <a:r>
+              <a:rPr sz="1066" b="1">
+                <a:solidFill>
+                  <a:srgbClr val="005CC5"/>
+                </a:solidFill>
+                <a:latin typeface="Consolas"/>
+                <a:ea typeface="Consolas"/>
+                <a:cs typeface="Consolas"/>
+              </a:rPr>
+              <a:t>true</a:t>
+            </a:r>
+            <a:r>
+              <a:rPr sz="1066">
+                <a:solidFill>
+                  <a:srgbClr val="5C6574"/>
+                </a:solidFill>
+                <a:latin typeface="Consolas"/>
+                <a:ea typeface="Consolas"/>
+                <a:cs typeface="Consolas"/>
+              </a:rPr>
+              <a:t>)]</a:t>
+            </a:r>
           </a:p>
           <a:p xmlns:a="http://schemas.openxmlformats.org/drawingml/2006/main">
             <a:pPr>
@@ -10079,6 +10123,17 @@
               <a:t> 2  </a:t>
             </a:r>
             <a:r>
+              <a:rPr sz="1066" b="1">
+                <a:solidFill>
+                  <a:srgbClr val="005CC5"/>
+                </a:solidFill>
+                <a:latin typeface="Consolas"/>
+                <a:ea typeface="Consolas"/>
+                <a:cs typeface="Consolas"/>
+              </a:rPr>
+              <a:t>public</a:t>
+            </a:r>
+            <a:r>
               <a:rPr sz="1066">
                 <a:solidFill>
                   <a:srgbClr val="262B36"/>
@@ -10087,7 +10142,7 @@
                 <a:ea typeface="Consolas"/>
                 <a:cs typeface="Consolas"/>
               </a:rPr>
-              <a:t>    </a:t>
+              <a:t> </a:t>
             </a:r>
             <a:r>
               <a:rPr sz="1066" b="1">
@@ -10098,18 +10153,139 @@
                 <a:ea typeface="Consolas"/>
                 <a:cs typeface="Consolas"/>
               </a:rPr>
-              <a:t>true</a:t>
+              <a:t>async</a:t>
             </a:r>
             <a:r>
               <a:rPr sz="1066">
                 <a:solidFill>
+                  <a:srgbClr val="262B36"/>
+                </a:solidFill>
+                <a:latin typeface="Consolas"/>
+                <a:ea typeface="Consolas"/>
+                <a:cs typeface="Consolas"/>
+              </a:rPr>
+              <a:t> </a:t>
+            </a:r>
+            <a:r>
+              <a:rPr sz="1066" b="1">
+                <a:solidFill>
+                  <a:srgbClr val="7442C8"/>
+                </a:solidFill>
+                <a:latin typeface="Consolas"/>
+                <a:ea typeface="Consolas"/>
+                <a:cs typeface="Consolas"/>
+              </a:rPr>
+              <a:t>Task</a:t>
+            </a:r>
+            <a:r>
+              <a:rPr sz="1066">
+                <a:solidFill>
                   <a:srgbClr val="5C6574"/>
                 </a:solidFill>
                 <a:latin typeface="Consolas"/>
                 <a:ea typeface="Consolas"/>
                 <a:cs typeface="Consolas"/>
               </a:rPr>
-              <a:t>)]</a:t>
+              <a:t>&lt;</a:t>
+            </a:r>
+            <a:r>
+              <a:rPr sz="1066" b="1">
+                <a:solidFill>
+                  <a:srgbClr val="005CC5"/>
+                </a:solidFill>
+                <a:latin typeface="Consolas"/>
+                <a:ea typeface="Consolas"/>
+                <a:cs typeface="Consolas"/>
+              </a:rPr>
+              <a:t>string</a:t>
+            </a:r>
+            <a:r>
+              <a:rPr sz="1066">
+                <a:solidFill>
+                  <a:srgbClr val="5C6574"/>
+                </a:solidFill>
+                <a:latin typeface="Consolas"/>
+                <a:ea typeface="Consolas"/>
+                <a:cs typeface="Consolas"/>
+              </a:rPr>
+              <a:t>&gt;</a:t>
+            </a:r>
+            <a:r>
+              <a:rPr sz="1066">
+                <a:solidFill>
+                  <a:srgbClr val="262B36"/>
+                </a:solidFill>
+                <a:latin typeface="Consolas"/>
+                <a:ea typeface="Consolas"/>
+                <a:cs typeface="Consolas"/>
+              </a:rPr>
+              <a:t> </a:t>
+            </a:r>
+            <a:r>
+              <a:rPr sz="1066" b="1">
+                <a:solidFill>
+                  <a:srgbClr val="7442C8"/>
+                </a:solidFill>
+                <a:latin typeface="Consolas"/>
+                <a:ea typeface="Consolas"/>
+                <a:cs typeface="Consolas"/>
+              </a:rPr>
+              <a:t>RunUnitTests</a:t>
+            </a:r>
+            <a:r>
+              <a:rPr sz="1066">
+                <a:solidFill>
+                  <a:srgbClr val="5C6574"/>
+                </a:solidFill>
+                <a:latin typeface="Consolas"/>
+                <a:ea typeface="Consolas"/>
+                <a:cs typeface="Consolas"/>
+              </a:rPr>
+              <a:t>(</a:t>
+            </a:r>
+            <a:r>
+              <a:rPr sz="1066" b="1">
+                <a:solidFill>
+                  <a:srgbClr val="7442C8"/>
+                </a:solidFill>
+                <a:latin typeface="Consolas"/>
+                <a:ea typeface="Consolas"/>
+                <a:cs typeface="Consolas"/>
+              </a:rPr>
+              <a:t>CancellationToken</a:t>
+            </a:r>
+            <a:r>
+              <a:rPr sz="1066">
+                <a:solidFill>
+                  <a:srgbClr val="262B36"/>
+                </a:solidFill>
+                <a:latin typeface="Consolas"/>
+                <a:ea typeface="Consolas"/>
+                <a:cs typeface="Consolas"/>
+              </a:rPr>
+              <a:t> </a:t>
+            </a:r>
+            <a:r>
+              <a:rPr sz="1066">
+                <a:solidFill>
+                  <a:srgbClr val="262B36"/>
+                </a:solidFill>
+                <a:latin typeface="Consolas"/>
+                <a:ea typeface="Consolas"/>
+                <a:cs typeface="Consolas"/>
+              </a:rPr>
+              <a:t>ct</a:t>
+            </a:r>
+            <a:r>
+              <a:rPr sz="1066">
+                <a:solidFill>
+                  <a:srgbClr val="5C6574"/>
+                </a:solidFill>
+                <a:latin typeface="Consolas"/>
+                <a:ea typeface="Consolas"/>
+                <a:cs typeface="Consolas"/>
+              </a:rPr>
+              <a:t>)</a:t>
             </a:r>
           </a:p>
           <a:p xmlns:a="http://schemas.openxmlformats.org/drawingml/2006/main">
@@ -10137,136 +10313,15 @@
               <a:t> 3  </a:t>
             </a:r>
             <a:r>
-              <a:rPr sz="1066" b="1">
-                <a:solidFill>
-                  <a:srgbClr val="005CC5"/>
-                </a:solidFill>
-                <a:latin typeface="Consolas"/>
-                <a:ea typeface="Consolas"/>
-                <a:cs typeface="Consolas"/>
-              </a:rPr>
-              <a:t>public</a:t>
-            </a:r>
-            <a:r>
               <a:rPr sz="1066">
                 <a:solidFill>
-                  <a:srgbClr val="262B36"/>
-                </a:solidFill>
-                <a:latin typeface="Consolas"/>
-                <a:ea typeface="Consolas"/>
-                <a:cs typeface="Consolas"/>
-              </a:rPr>
-              <a:t> </a:t>
-            </a:r>
-            <a:r>
-              <a:rPr sz="1066" b="1">
-                <a:solidFill>
-                  <a:srgbClr val="005CC5"/>
-                </a:solidFill>
-                <a:latin typeface="Consolas"/>
-                <a:ea typeface="Consolas"/>
-                <a:cs typeface="Consolas"/>
-              </a:rPr>
-              <a:t>async</a:t>
-            </a:r>
-            <a:r>
-              <a:rPr sz="1066">
-                <a:solidFill>
-                  <a:srgbClr val="262B36"/>
-                </a:solidFill>
-                <a:latin typeface="Consolas"/>
-                <a:ea typeface="Consolas"/>
-                <a:cs typeface="Consolas"/>
-              </a:rPr>
-              <a:t> </a:t>
-            </a:r>
-            <a:r>
-              <a:rPr sz="1066" b="1">
-                <a:solidFill>
-                  <a:srgbClr val="005CC5"/>
-                </a:solidFill>
-                <a:latin typeface="Consolas"/>
-                <a:ea typeface="Consolas"/>
-                <a:cs typeface="Consolas"/>
-              </a:rPr>
-              <a:t>Task</a:t>
-            </a:r>
-            <a:r>
-              <a:rPr sz="1066">
-                <a:solidFill>
                   <a:srgbClr val="5C6574"/>
                 </a:solidFill>
                 <a:latin typeface="Consolas"/>
                 <a:ea typeface="Consolas"/>
                 <a:cs typeface="Consolas"/>
               </a:rPr>
-              <a:t>&lt;</a:t>
-            </a:r>
-            <a:r>
-              <a:rPr sz="1066" b="1">
-                <a:solidFill>
-                  <a:srgbClr val="005CC5"/>
-                </a:solidFill>
-                <a:latin typeface="Consolas"/>
-                <a:ea typeface="Consolas"/>
-                <a:cs typeface="Consolas"/>
-              </a:rPr>
-              <a:t>string</a:t>
-            </a:r>
-            <a:r>
-              <a:rPr sz="1066">
-                <a:solidFill>
-                  <a:srgbClr val="5C6574"/>
-                </a:solidFill>
-                <a:latin typeface="Consolas"/>
-                <a:ea typeface="Consolas"/>
-                <a:cs typeface="Consolas"/>
-              </a:rPr>
-              <a:t>&gt;</a:t>
-            </a:r>
-            <a:r>
-              <a:rPr sz="1066">
-                <a:solidFill>
-                  <a:srgbClr val="262B36"/>
-                </a:solidFill>
-                <a:latin typeface="Consolas"/>
-                <a:ea typeface="Consolas"/>
-                <a:cs typeface="Consolas"/>
-              </a:rPr>
-              <a:t> </a:t>
-            </a:r>
-            <a:r>
-              <a:rPr sz="1066" b="1">
-                <a:solidFill>
-                  <a:srgbClr val="7442C8"/>
-                </a:solidFill>
-                <a:latin typeface="Consolas"/>
-                <a:ea typeface="Consolas"/>
-                <a:cs typeface="Consolas"/>
-              </a:rPr>
-              <a:t>RunUnitTests</a:t>
-            </a:r>
-            <a:r>
-              <a:rPr sz="1066">
-                <a:solidFill>
-                  <a:srgbClr val="5C6574"/>
-                </a:solidFill>
-                <a:latin typeface="Consolas"/>
-                <a:ea typeface="Consolas"/>
-                <a:cs typeface="Consolas"/>
-              </a:rPr>
-              <a:t>(</a:t>
-            </a:r>
-            <a:r>
-              <a:rPr sz="1066" b="1">
-                <a:solidFill>
-                  <a:srgbClr val="005CC5"/>
-                </a:solidFill>
-                <a:latin typeface="Consolas"/>
-                <a:ea typeface="Consolas"/>
-                <a:cs typeface="Consolas"/>
-              </a:rPr>
-              <a:t>CancellationToken</a:t>
+              <a:t>{</a:t>
             </a:r>
           </a:p>
           <a:p xmlns:a="http://schemas.openxmlformats.org/drawingml/2006/main">
@@ -10302,18 +10357,139 @@
                 <a:ea typeface="Consolas"/>
                 <a:cs typeface="Consolas"/>
               </a:rPr>
-              <a:t>    ct</a:t>
+              <a:t>  </a:t>
+            </a:r>
+            <a:r>
+              <a:rPr sz="1066" b="1">
+                <a:solidFill>
+                  <a:srgbClr val="005CC5"/>
+                </a:solidFill>
+                <a:latin typeface="Consolas"/>
+                <a:ea typeface="Consolas"/>
+                <a:cs typeface="Consolas"/>
+              </a:rPr>
+              <a:t>var</a:t>
             </a:r>
             <a:r>
               <a:rPr sz="1066">
                 <a:solidFill>
+                  <a:srgbClr val="262B36"/>
+                </a:solidFill>
+                <a:latin typeface="Consolas"/>
+                <a:ea typeface="Consolas"/>
+                <a:cs typeface="Consolas"/>
+              </a:rPr>
+              <a:t> </a:t>
+            </a:r>
+            <a:r>
+              <a:rPr sz="1066">
+                <a:solidFill>
+                  <a:srgbClr val="262B36"/>
+                </a:solidFill>
+                <a:latin typeface="Consolas"/>
+                <a:ea typeface="Consolas"/>
+                <a:cs typeface="Consolas"/>
+              </a:rPr>
+              <a:t>result</a:t>
+            </a:r>
+            <a:r>
+              <a:rPr sz="1066">
+                <a:solidFill>
+                  <a:srgbClr val="262B36"/>
+                </a:solidFill>
+                <a:latin typeface="Consolas"/>
+                <a:ea typeface="Consolas"/>
+                <a:cs typeface="Consolas"/>
+              </a:rPr>
+              <a:t> </a:t>
+            </a:r>
+            <a:r>
+              <a:rPr sz="1066">
+                <a:solidFill>
                   <a:srgbClr val="5C6574"/>
                 </a:solidFill>
                 <a:latin typeface="Consolas"/>
                 <a:ea typeface="Consolas"/>
                 <a:cs typeface="Consolas"/>
               </a:rPr>
-              <a:t>)</a:t>
+              <a:t>=</a:t>
+            </a:r>
+            <a:r>
+              <a:rPr sz="1066">
+                <a:solidFill>
+                  <a:srgbClr val="262B36"/>
+                </a:solidFill>
+                <a:latin typeface="Consolas"/>
+                <a:ea typeface="Consolas"/>
+                <a:cs typeface="Consolas"/>
+              </a:rPr>
+              <a:t> </a:t>
+            </a:r>
+            <a:r>
+              <a:rPr sz="1066" b="1">
+                <a:solidFill>
+                  <a:srgbClr val="005CC5"/>
+                </a:solidFill>
+                <a:latin typeface="Consolas"/>
+                <a:ea typeface="Consolas"/>
+                <a:cs typeface="Consolas"/>
+              </a:rPr>
+              <a:t>await</a:t>
+            </a:r>
+            <a:r>
+              <a:rPr sz="1066">
+                <a:solidFill>
+                  <a:srgbClr val="262B36"/>
+                </a:solidFill>
+                <a:latin typeface="Consolas"/>
+                <a:ea typeface="Consolas"/>
+                <a:cs typeface="Consolas"/>
+              </a:rPr>
+              <a:t> </a:t>
+            </a:r>
+            <a:r>
+              <a:rPr sz="1066">
+                <a:solidFill>
+                  <a:srgbClr val="262B36"/>
+                </a:solidFill>
+                <a:latin typeface="Consolas"/>
+                <a:ea typeface="Consolas"/>
+                <a:cs typeface="Consolas"/>
+              </a:rPr>
+              <a:t>commands</a:t>
+            </a:r>
+            <a:r>
+              <a:rPr sz="1066">
+                <a:solidFill>
+                  <a:srgbClr val="5C6574"/>
+                </a:solidFill>
+                <a:latin typeface="Consolas"/>
+                <a:ea typeface="Consolas"/>
+                <a:cs typeface="Consolas"/>
+              </a:rPr>
+              <a:t>.</a:t>
+            </a:r>
+            <a:r>
+              <a:rPr sz="1066" b="1">
+                <a:solidFill>
+                  <a:srgbClr val="7442C8"/>
+                </a:solidFill>
+                <a:latin typeface="Consolas"/>
+                <a:ea typeface="Consolas"/>
+                <a:cs typeface="Consolas"/>
+              </a:rPr>
+              <a:t>RunAsync</a:t>
+            </a:r>
+            <a:r>
+              <a:rPr sz="1066">
+                <a:solidFill>
+                  <a:srgbClr val="5C6574"/>
+                </a:solidFill>
+                <a:latin typeface="Consolas"/>
+                <a:ea typeface="Consolas"/>
+                <a:cs typeface="Consolas"/>
+              </a:rPr>
+              <a:t>(</a:t>
             </a:r>
           </a:p>
           <a:p xmlns:a="http://schemas.openxmlformats.org/drawingml/2006/main">
@@ -10343,13 +10519,90 @@
             <a:r>
               <a:rPr sz="1066">
                 <a:solidFill>
+                  <a:srgbClr val="262B36"/>
+                </a:solidFill>
+                <a:latin typeface="Consolas"/>
+                <a:ea typeface="Consolas"/>
+                <a:cs typeface="Consolas"/>
+              </a:rPr>
+              <a:t>      </a:t>
+            </a:r>
+            <a:r>
+              <a:rPr sz="1066" b="1">
+                <a:solidFill>
+                  <a:srgbClr val="7442C8"/>
+                </a:solidFill>
+                <a:latin typeface="Consolas"/>
+                <a:ea typeface="Consolas"/>
+                <a:cs typeface="Consolas"/>
+              </a:rPr>
+              <a:t>ProjectCommand</a:t>
+            </a:r>
+            <a:r>
+              <a:rPr sz="1066">
+                <a:solidFill>
                   <a:srgbClr val="5C6574"/>
                 </a:solidFill>
                 <a:latin typeface="Consolas"/>
                 <a:ea typeface="Consolas"/>
                 <a:cs typeface="Consolas"/>
               </a:rPr>
-              <a:t>{</a:t>
+              <a:t>.</a:t>
+            </a:r>
+            <a:r>
+              <a:rPr sz="1066" b="1">
+                <a:solidFill>
+                  <a:srgbClr val="7442C8"/>
+                </a:solidFill>
+                <a:latin typeface="Consolas"/>
+                <a:ea typeface="Consolas"/>
+                <a:cs typeface="Consolas"/>
+              </a:rPr>
+              <a:t>RunUnitTests</a:t>
+            </a:r>
+            <a:r>
+              <a:rPr sz="1066">
+                <a:solidFill>
+                  <a:srgbClr val="5C6574"/>
+                </a:solidFill>
+                <a:latin typeface="Consolas"/>
+                <a:ea typeface="Consolas"/>
+                <a:cs typeface="Consolas"/>
+              </a:rPr>
+              <a:t>,</a:t>
+            </a:r>
+            <a:r>
+              <a:rPr sz="1066">
+                <a:solidFill>
+                  <a:srgbClr val="262B36"/>
+                </a:solidFill>
+                <a:latin typeface="Consolas"/>
+                <a:ea typeface="Consolas"/>
+                <a:cs typeface="Consolas"/>
+              </a:rPr>
+              <a:t> </a:t>
+            </a:r>
+            <a:r>
+              <a:rPr sz="1066">
+                <a:solidFill>
+                  <a:srgbClr val="262B36"/>
+                </a:solidFill>
+                <a:latin typeface="Consolas"/>
+                <a:ea typeface="Consolas"/>
+                <a:cs typeface="Consolas"/>
+              </a:rPr>
+              <a:t>ct</a:t>
+            </a:r>
+            <a:r>
+              <a:rPr sz="1066">
+                <a:solidFill>
+                  <a:srgbClr val="5C6574"/>
+                </a:solidFill>
+                <a:latin typeface="Consolas"/>
+                <a:ea typeface="Consolas"/>
+                <a:cs typeface="Consolas"/>
+              </a:rPr>
+              <a:t>);</a:t>
             </a:r>
           </a:p>
           <a:p xmlns:a="http://schemas.openxmlformats.org/drawingml/2006/main">
@@ -10396,7 +10649,7 @@
                 <a:ea typeface="Consolas"/>
                 <a:cs typeface="Consolas"/>
               </a:rPr>
-              <a:t>var</a:t>
+              <a:t>return</a:t>
             </a:r>
             <a:r>
               <a:rPr sz="1066">
@@ -10407,7 +10660,18 @@
                 <a:ea typeface="Consolas"/>
                 <a:cs typeface="Consolas"/>
               </a:rPr>
-              <a:t> result </a:t>
+              <a:t> </a:t>
+            </a:r>
+            <a:r>
+              <a:rPr sz="1066" b="1">
+                <a:solidFill>
+                  <a:srgbClr val="7442C8"/>
+                </a:solidFill>
+                <a:latin typeface="Consolas"/>
+                <a:ea typeface="Consolas"/>
+                <a:cs typeface="Consolas"/>
+              </a:rPr>
+              <a:t>ToolResultJson</a:t>
             </a:r>
             <a:r>
               <a:rPr sz="1066">
@@ -10418,62 +10682,18 @@
                 <a:ea typeface="Consolas"/>
                 <a:cs typeface="Consolas"/>
               </a:rPr>
-              <a:t>=</a:t>
-            </a:r>
-            <a:r>
-              <a:rPr sz="1066">
-                <a:solidFill>
-                  <a:srgbClr val="262B36"/>
-                </a:solidFill>
-                <a:latin typeface="Consolas"/>
-                <a:ea typeface="Consolas"/>
-                <a:cs typeface="Consolas"/>
-              </a:rPr>
-              <a:t> </a:t>
+              <a:t>.</a:t>
             </a:r>
             <a:r>
               <a:rPr sz="1066" b="1">
                 <a:solidFill>
-                  <a:srgbClr val="005CC5"/>
-                </a:solidFill>
-                <a:latin typeface="Consolas"/>
-                <a:ea typeface="Consolas"/>
-                <a:cs typeface="Consolas"/>
-              </a:rPr>
-              <a:t>await</a:t>
-            </a:r>
-            <a:r>
-              <a:rPr sz="1066">
-                <a:solidFill>
-                  <a:srgbClr val="262B36"/>
-                </a:solidFill>
-                <a:latin typeface="Consolas"/>
-                <a:ea typeface="Consolas"/>
-                <a:cs typeface="Consolas"/>
-              </a:rPr>
-              <a:t> workspace</a:t>
-            </a:r>
-            <a:r>
-              <a:rPr sz="1066">
-                <a:solidFill>
-                  <a:srgbClr val="5C6574"/>
-                </a:solidFill>
-                <a:latin typeface="Consolas"/>
-                <a:ea typeface="Consolas"/>
-                <a:cs typeface="Consolas"/>
-              </a:rPr>
-              <a:t>.</a:t>
-            </a:r>
-            <a:r>
-              <a:rPr sz="1066" b="1">
-                <a:solidFill>
                   <a:srgbClr val="7442C8"/>
                 </a:solidFill>
                 <a:latin typeface="Consolas"/>
                 <a:ea typeface="Consolas"/>
                 <a:cs typeface="Consolas"/>
               </a:rPr>
-              <a:t>RunFixedCommandAsync</a:t>
+              <a:t>Serialize</a:t>
             </a:r>
             <a:r>
               <a:rPr sz="1066">
@@ -10520,18 +10740,40 @@
                 <a:ea typeface="Consolas"/>
                 <a:cs typeface="Consolas"/>
               </a:rPr>
-              <a:t>    </a:t>
+              <a:t>      </a:t>
+            </a:r>
+            <a:r>
+              <a:rPr sz="1066" b="1">
+                <a:solidFill>
+                  <a:srgbClr val="7442C8"/>
+                </a:solidFill>
+                <a:latin typeface="Consolas"/>
+                <a:ea typeface="Consolas"/>
+                <a:cs typeface="Consolas"/>
+              </a:rPr>
+              <a:t>UnitTestToolResult</a:t>
             </a:r>
             <a:r>
               <a:rPr sz="1066">
                 <a:solidFill>
-                  <a:srgbClr val="A95921"/>
-                </a:solidFill>
-                <a:latin typeface="Consolas"/>
-                <a:ea typeface="Consolas"/>
-                <a:cs typeface="Consolas"/>
-              </a:rPr>
-              <a:t>"dotnet"</a:t>
+                  <a:srgbClr val="5C6574"/>
+                </a:solidFill>
+                <a:latin typeface="Consolas"/>
+                <a:ea typeface="Consolas"/>
+                <a:cs typeface="Consolas"/>
+              </a:rPr>
+              <a:t>.</a:t>
+            </a:r>
+            <a:r>
+              <a:rPr sz="1066" b="1">
+                <a:solidFill>
+                  <a:srgbClr val="7442C8"/>
+                </a:solidFill>
+                <a:latin typeface="Consolas"/>
+                <a:ea typeface="Consolas"/>
+                <a:cs typeface="Consolas"/>
+              </a:rPr>
+              <a:t>From</a:t>
             </a:r>
             <a:r>
               <a:rPr sz="1066">
@@ -10542,7 +10784,29 @@
                 <a:ea typeface="Consolas"/>
                 <a:cs typeface="Consolas"/>
               </a:rPr>
-              <a:t>,</a:t>
+              <a:t>(</a:t>
+            </a:r>
+            <a:r>
+              <a:rPr sz="1066">
+                <a:solidFill>
+                  <a:srgbClr val="262B36"/>
+                </a:solidFill>
+                <a:latin typeface="Consolas"/>
+                <a:ea typeface="Consolas"/>
+                <a:cs typeface="Consolas"/>
+              </a:rPr>
+              <a:t>result</a:t>
+            </a:r>
+            <a:r>
+              <a:rPr sz="1066">
+                <a:solidFill>
+                  <a:srgbClr val="5C6574"/>
+                </a:solidFill>
+                <a:latin typeface="Consolas"/>
+                <a:ea typeface="Consolas"/>
+                <a:cs typeface="Consolas"/>
+              </a:rPr>
+              <a:t>));</a:t>
             </a:r>
           </a:p>
           <a:p xmlns:a="http://schemas.openxmlformats.org/drawingml/2006/main">
@@ -10572,112 +10836,13 @@
             <a:r>
               <a:rPr sz="1066">
                 <a:solidFill>
-                  <a:srgbClr val="262B36"/>
-                </a:solidFill>
-                <a:latin typeface="Consolas"/>
-                <a:ea typeface="Consolas"/>
-                <a:cs typeface="Consolas"/>
-              </a:rPr>
-              <a:t>    </a:t>
-            </a:r>
-            <a:r>
-              <a:rPr sz="1066">
-                <a:solidFill>
                   <a:srgbClr val="5C6574"/>
                 </a:solidFill>
                 <a:latin typeface="Consolas"/>
                 <a:ea typeface="Consolas"/>
                 <a:cs typeface="Consolas"/>
               </a:rPr>
-              <a:t>[</a:t>
-            </a:r>
-            <a:r>
-              <a:rPr sz="1066">
-                <a:solidFill>
-                  <a:srgbClr val="A95921"/>
-                </a:solidFill>
-                <a:latin typeface="Consolas"/>
-                <a:ea typeface="Consolas"/>
-                <a:cs typeface="Consolas"/>
-              </a:rPr>
-              <a:t>"test"</a:t>
-            </a:r>
-            <a:r>
-              <a:rPr sz="1066">
-                <a:solidFill>
-                  <a:srgbClr val="5C6574"/>
-                </a:solidFill>
-                <a:latin typeface="Consolas"/>
-                <a:ea typeface="Consolas"/>
-                <a:cs typeface="Consolas"/>
-              </a:rPr>
-              <a:t>,</a:t>
-            </a:r>
-            <a:r>
-              <a:rPr sz="1066">
-                <a:solidFill>
-                  <a:srgbClr val="262B36"/>
-                </a:solidFill>
-                <a:latin typeface="Consolas"/>
-                <a:ea typeface="Consolas"/>
-                <a:cs typeface="Consolas"/>
-              </a:rPr>
-              <a:t> </a:t>
-            </a:r>
-            <a:r>
-              <a:rPr sz="1066">
-                <a:solidFill>
-                  <a:srgbClr val="A95921"/>
-                </a:solidFill>
-                <a:latin typeface="Consolas"/>
-                <a:ea typeface="Consolas"/>
-                <a:cs typeface="Consolas"/>
-              </a:rPr>
-              <a:t>"EquipmentReservation.sln"</a:t>
-            </a:r>
-            <a:r>
-              <a:rPr sz="1066">
-                <a:solidFill>
-                  <a:srgbClr val="5C6574"/>
-                </a:solidFill>
-                <a:latin typeface="Consolas"/>
-                <a:ea typeface="Consolas"/>
-                <a:cs typeface="Consolas"/>
-              </a:rPr>
-              <a:t>,</a:t>
-            </a:r>
-            <a:r>
-              <a:rPr sz="1066">
-                <a:solidFill>
-                  <a:srgbClr val="262B36"/>
-                </a:solidFill>
-                <a:latin typeface="Consolas"/>
-                <a:ea typeface="Consolas"/>
-                <a:cs typeface="Consolas"/>
-              </a:rPr>
-              <a:t> </a:t>
-            </a:r>
-            <a:r>
-              <a:rPr sz="1066">
-                <a:solidFill>
-                  <a:srgbClr val="A95921"/>
-                </a:solidFill>
-                <a:latin typeface="Consolas"/>
-                <a:ea typeface="Consolas"/>
-                <a:cs typeface="Consolas"/>
-              </a:rPr>
-              <a:t>"--nologo"</a:t>
-            </a:r>
-            <a:r>
-              <a:rPr sz="1066">
-                <a:solidFill>
-                  <a:srgbClr val="5C6574"/>
-                </a:solidFill>
-                <a:latin typeface="Consolas"/>
-                <a:ea typeface="Consolas"/>
-                <a:cs typeface="Consolas"/>
-              </a:rPr>
-              <a:t>,</a:t>
+              <a:t>}</a:t>
             </a:r>
           </a:p>
           <a:p xmlns:a="http://schemas.openxmlformats.org/drawingml/2006/main">
@@ -10704,72 +10869,6 @@
               </a:rPr>
               <a:t> 9  </a:t>
             </a:r>
-            <a:r>
-              <a:rPr sz="1066">
-                <a:solidFill>
-                  <a:srgbClr val="262B36"/>
-                </a:solidFill>
-                <a:latin typeface="Consolas"/>
-                <a:ea typeface="Consolas"/>
-                <a:cs typeface="Consolas"/>
-              </a:rPr>
-              <a:t>        </a:t>
-            </a:r>
-            <a:r>
-              <a:rPr sz="1066">
-                <a:solidFill>
-                  <a:srgbClr val="A95921"/>
-                </a:solidFill>
-                <a:latin typeface="Consolas"/>
-                <a:ea typeface="Consolas"/>
-                <a:cs typeface="Consolas"/>
-              </a:rPr>
-              <a:t>"--verbosity"</a:t>
-            </a:r>
-            <a:r>
-              <a:rPr sz="1066">
-                <a:solidFill>
-                  <a:srgbClr val="5C6574"/>
-                </a:solidFill>
-                <a:latin typeface="Consolas"/>
-                <a:ea typeface="Consolas"/>
-                <a:cs typeface="Consolas"/>
-              </a:rPr>
-              <a:t>,</a:t>
-            </a:r>
-            <a:r>
-              <a:rPr sz="1066">
-                <a:solidFill>
-                  <a:srgbClr val="262B36"/>
-                </a:solidFill>
-                <a:latin typeface="Consolas"/>
-                <a:ea typeface="Consolas"/>
-                <a:cs typeface="Consolas"/>
-              </a:rPr>
-              <a:t> </a:t>
-            </a:r>
-            <a:r>
-              <a:rPr sz="1066">
-                <a:solidFill>
-                  <a:srgbClr val="A95921"/>
-                </a:solidFill>
-                <a:latin typeface="Consolas"/>
-                <a:ea typeface="Consolas"/>
-                <a:cs typeface="Consolas"/>
-              </a:rPr>
-              <a:t>"minimal"</a:t>
-            </a:r>
-            <a:r>
-              <a:rPr sz="1066">
-                <a:solidFill>
-                  <a:srgbClr val="5C6574"/>
-                </a:solidFill>
-                <a:latin typeface="Consolas"/>
-                <a:ea typeface="Consolas"/>
-                <a:cs typeface="Consolas"/>
-              </a:rPr>
-              <a:t>],</a:t>
-            </a:r>
           </a:p>
           <a:p xmlns:a="http://schemas.openxmlformats.org/drawingml/2006/main">
             <a:pPr>
@@ -10798,24 +10897,13 @@
             <a:r>
               <a:rPr sz="1066">
                 <a:solidFill>
-                  <a:srgbClr val="262B36"/>
-                </a:solidFill>
-                <a:latin typeface="Consolas"/>
-                <a:ea typeface="Consolas"/>
-                <a:cs typeface="Consolas"/>
-              </a:rPr>
-              <a:t>    ct</a:t>
-            </a:r>
-            <a:r>
-              <a:rPr sz="1066">
-                <a:solidFill>
-                  <a:srgbClr val="5C6574"/>
-                </a:solidFill>
-                <a:latin typeface="Consolas"/>
-                <a:ea typeface="Consolas"/>
-                <a:cs typeface="Consolas"/>
-              </a:rPr>
-              <a:t>);</a:t>
+                  <a:srgbClr val="55845A"/>
+                </a:solidFill>
+                <a:latin typeface="Consolas"/>
+                <a:ea typeface="Consolas"/>
+                <a:cs typeface="Consolas"/>
+              </a:rPr>
+              <a:t>// ProjectCommand има приватан конструктор</a:t>
             </a:r>
           </a:p>
           <a:p xmlns:a="http://schemas.openxmlformats.org/drawingml/2006/main">
@@ -10842,6 +10930,215 @@
               </a:rPr>
               <a:t>11  </a:t>
             </a:r>
+            <a:r>
+              <a:rPr sz="1066" b="1">
+                <a:solidFill>
+                  <a:srgbClr val="005CC5"/>
+                </a:solidFill>
+                <a:latin typeface="Consolas"/>
+                <a:ea typeface="Consolas"/>
+                <a:cs typeface="Consolas"/>
+              </a:rPr>
+              <a:t>public</a:t>
+            </a:r>
+            <a:r>
+              <a:rPr sz="1066">
+                <a:solidFill>
+                  <a:srgbClr val="262B36"/>
+                </a:solidFill>
+                <a:latin typeface="Consolas"/>
+                <a:ea typeface="Consolas"/>
+                <a:cs typeface="Consolas"/>
+              </a:rPr>
+              <a:t> </a:t>
+            </a:r>
+            <a:r>
+              <a:rPr sz="1066" b="1">
+                <a:solidFill>
+                  <a:srgbClr val="005CC5"/>
+                </a:solidFill>
+                <a:latin typeface="Consolas"/>
+                <a:ea typeface="Consolas"/>
+                <a:cs typeface="Consolas"/>
+              </a:rPr>
+              <a:t>static</a:t>
+            </a:r>
+            <a:r>
+              <a:rPr sz="1066">
+                <a:solidFill>
+                  <a:srgbClr val="262B36"/>
+                </a:solidFill>
+                <a:latin typeface="Consolas"/>
+                <a:ea typeface="Consolas"/>
+                <a:cs typeface="Consolas"/>
+              </a:rPr>
+              <a:t> </a:t>
+            </a:r>
+            <a:r>
+              <a:rPr sz="1066" b="1">
+                <a:solidFill>
+                  <a:srgbClr val="7442C8"/>
+                </a:solidFill>
+                <a:latin typeface="Consolas"/>
+                <a:ea typeface="Consolas"/>
+                <a:cs typeface="Consolas"/>
+              </a:rPr>
+              <a:t>ProjectCommand</a:t>
+            </a:r>
+            <a:r>
+              <a:rPr sz="1066">
+                <a:solidFill>
+                  <a:srgbClr val="262B36"/>
+                </a:solidFill>
+                <a:latin typeface="Consolas"/>
+                <a:ea typeface="Consolas"/>
+                <a:cs typeface="Consolas"/>
+              </a:rPr>
+              <a:t> </a:t>
+            </a:r>
+            <a:r>
+              <a:rPr sz="1066" b="1">
+                <a:solidFill>
+                  <a:srgbClr val="7442C8"/>
+                </a:solidFill>
+                <a:latin typeface="Consolas"/>
+                <a:ea typeface="Consolas"/>
+                <a:cs typeface="Consolas"/>
+              </a:rPr>
+              <a:t>RunUnitTests</a:t>
+            </a:r>
+            <a:r>
+              <a:rPr sz="1066">
+                <a:solidFill>
+                  <a:srgbClr val="262B36"/>
+                </a:solidFill>
+                <a:latin typeface="Consolas"/>
+                <a:ea typeface="Consolas"/>
+                <a:cs typeface="Consolas"/>
+              </a:rPr>
+              <a:t> </a:t>
+            </a:r>
+            <a:r>
+              <a:rPr sz="1066">
+                <a:solidFill>
+                  <a:srgbClr val="5C6574"/>
+                </a:solidFill>
+                <a:latin typeface="Consolas"/>
+                <a:ea typeface="Consolas"/>
+                <a:cs typeface="Consolas"/>
+              </a:rPr>
+              <a:t>{</a:t>
+            </a:r>
+            <a:r>
+              <a:rPr sz="1066">
+                <a:solidFill>
+                  <a:srgbClr val="262B36"/>
+                </a:solidFill>
+                <a:latin typeface="Consolas"/>
+                <a:ea typeface="Consolas"/>
+                <a:cs typeface="Consolas"/>
+              </a:rPr>
+              <a:t> </a:t>
+            </a:r>
+            <a:r>
+              <a:rPr sz="1066" b="1">
+                <a:solidFill>
+                  <a:srgbClr val="005CC5"/>
+                </a:solidFill>
+                <a:latin typeface="Consolas"/>
+                <a:ea typeface="Consolas"/>
+                <a:cs typeface="Consolas"/>
+              </a:rPr>
+              <a:t>get</a:t>
+            </a:r>
+            <a:r>
+              <a:rPr sz="1066">
+                <a:solidFill>
+                  <a:srgbClr val="5C6574"/>
+                </a:solidFill>
+                <a:latin typeface="Consolas"/>
+                <a:ea typeface="Consolas"/>
+                <a:cs typeface="Consolas"/>
+              </a:rPr>
+              <a:t>;</a:t>
+            </a:r>
+            <a:r>
+              <a:rPr sz="1066">
+                <a:solidFill>
+                  <a:srgbClr val="262B36"/>
+                </a:solidFill>
+                <a:latin typeface="Consolas"/>
+                <a:ea typeface="Consolas"/>
+                <a:cs typeface="Consolas"/>
+              </a:rPr>
+              <a:t> </a:t>
+            </a:r>
+            <a:r>
+              <a:rPr sz="1066">
+                <a:solidFill>
+                  <a:srgbClr val="5C6574"/>
+                </a:solidFill>
+                <a:latin typeface="Consolas"/>
+                <a:ea typeface="Consolas"/>
+                <a:cs typeface="Consolas"/>
+              </a:rPr>
+              <a:t>}</a:t>
+            </a:r>
+            <a:r>
+              <a:rPr sz="1066">
+                <a:solidFill>
+                  <a:srgbClr val="262B36"/>
+                </a:solidFill>
+                <a:latin typeface="Consolas"/>
+                <a:ea typeface="Consolas"/>
+                <a:cs typeface="Consolas"/>
+              </a:rPr>
+              <a:t> </a:t>
+            </a:r>
+            <a:r>
+              <a:rPr sz="1066">
+                <a:solidFill>
+                  <a:srgbClr val="5C6574"/>
+                </a:solidFill>
+                <a:latin typeface="Consolas"/>
+                <a:ea typeface="Consolas"/>
+                <a:cs typeface="Consolas"/>
+              </a:rPr>
+              <a:t>=</a:t>
+            </a:r>
+            <a:r>
+              <a:rPr sz="1066">
+                <a:solidFill>
+                  <a:srgbClr val="262B36"/>
+                </a:solidFill>
+                <a:latin typeface="Consolas"/>
+                <a:ea typeface="Consolas"/>
+                <a:cs typeface="Consolas"/>
+              </a:rPr>
+              <a:t> </a:t>
+            </a:r>
+            <a:r>
+              <a:rPr sz="1066" b="1">
+                <a:solidFill>
+                  <a:srgbClr val="005CC5"/>
+                </a:solidFill>
+                <a:latin typeface="Consolas"/>
+                <a:ea typeface="Consolas"/>
+                <a:cs typeface="Consolas"/>
+              </a:rPr>
+              <a:t>new</a:t>
+            </a:r>
+            <a:r>
+              <a:rPr sz="1066">
+                <a:solidFill>
+                  <a:srgbClr val="5C6574"/>
+                </a:solidFill>
+                <a:latin typeface="Consolas"/>
+                <a:ea typeface="Consolas"/>
+                <a:cs typeface="Consolas"/>
+              </a:rPr>
+              <a:t>(</a:t>
+            </a:r>
           </a:p>
           <a:p xmlns:a="http://schemas.openxmlformats.org/drawingml/2006/main">
             <a:pPr>
@@ -10876,150 +11173,95 @@
                 <a:ea typeface="Consolas"/>
                 <a:cs typeface="Consolas"/>
               </a:rPr>
-              <a:t>  </a:t>
-            </a:r>
-            <a:r>
-              <a:rPr sz="1066" b="1">
-                <a:solidFill>
-                  <a:srgbClr val="005CC5"/>
-                </a:solidFill>
-                <a:latin typeface="Consolas"/>
-                <a:ea typeface="Consolas"/>
-                <a:cs typeface="Consolas"/>
-              </a:rPr>
-              <a:t>return</a:t>
+              <a:t>    </a:t>
             </a:r>
             <a:r>
               <a:rPr sz="1066">
                 <a:solidFill>
+                  <a:srgbClr val="A95921"/>
+                </a:solidFill>
+                <a:latin typeface="Consolas"/>
+                <a:ea typeface="Consolas"/>
+                <a:cs typeface="Consolas"/>
+              </a:rPr>
+              <a:t>"dotnet"</a:t>
+            </a:r>
+            <a:r>
+              <a:rPr sz="1066">
+                <a:solidFill>
+                  <a:srgbClr val="5C6574"/>
+                </a:solidFill>
+                <a:latin typeface="Consolas"/>
+                <a:ea typeface="Consolas"/>
+                <a:cs typeface="Consolas"/>
+              </a:rPr>
+              <a:t>,</a:t>
+            </a:r>
+            <a:r>
+              <a:rPr sz="1066">
+                <a:solidFill>
                   <a:srgbClr val="262B36"/>
                 </a:solidFill>
                 <a:latin typeface="Consolas"/>
                 <a:ea typeface="Consolas"/>
                 <a:cs typeface="Consolas"/>
               </a:rPr>
-              <a:t> workspace</a:t>
+              <a:t> </a:t>
             </a:r>
             <a:r>
               <a:rPr sz="1066">
                 <a:solidFill>
+                  <a:srgbClr val="A95921"/>
+                </a:solidFill>
+                <a:latin typeface="Consolas"/>
+                <a:ea typeface="Consolas"/>
+                <a:cs typeface="Consolas"/>
+              </a:rPr>
+              <a:t>"test"</a:t>
+            </a:r>
+            <a:r>
+              <a:rPr sz="1066">
+                <a:solidFill>
                   <a:srgbClr val="5C6574"/>
                 </a:solidFill>
                 <a:latin typeface="Consolas"/>
                 <a:ea typeface="Consolas"/>
                 <a:cs typeface="Consolas"/>
               </a:rPr>
-              <a:t>.</a:t>
-            </a:r>
-            <a:r>
-              <a:rPr sz="1066" b="1">
-                <a:solidFill>
-                  <a:srgbClr val="7442C8"/>
-                </a:solidFill>
-                <a:latin typeface="Consolas"/>
-                <a:ea typeface="Consolas"/>
-                <a:cs typeface="Consolas"/>
-              </a:rPr>
-              <a:t>ToJson</a:t>
+              <a:t>,</a:t>
             </a:r>
             <a:r>
               <a:rPr sz="1066">
                 <a:solidFill>
+                  <a:srgbClr val="262B36"/>
+                </a:solidFill>
+                <a:latin typeface="Consolas"/>
+                <a:ea typeface="Consolas"/>
+                <a:cs typeface="Consolas"/>
+              </a:rPr>
+              <a:t> </a:t>
+            </a:r>
+            <a:r>
+              <a:rPr sz="1066">
+                <a:solidFill>
+                  <a:srgbClr val="A95921"/>
+                </a:solidFill>
+                <a:latin typeface="Consolas"/>
+                <a:ea typeface="Consolas"/>
+                <a:cs typeface="Consolas"/>
+              </a:rPr>
+              <a:t>"EquipmentReservation.sln"</a:t>
+            </a:r>
+            <a:r>
+              <a:rPr sz="1066">
+                <a:solidFill>
                   <a:srgbClr val="5C6574"/>
                 </a:solidFill>
                 <a:latin typeface="Consolas"/>
                 <a:ea typeface="Consolas"/>
                 <a:cs typeface="Consolas"/>
               </a:rPr>
-              <a:t>(</a:t>
-            </a:r>
-            <a:r>
-              <a:rPr sz="1066" b="1">
-                <a:solidFill>
-                  <a:srgbClr val="005CC5"/>
-                </a:solidFill>
-                <a:latin typeface="Consolas"/>
-                <a:ea typeface="Consolas"/>
-                <a:cs typeface="Consolas"/>
-              </a:rPr>
-              <a:t>new</a:t>
-            </a:r>
-            <a:r>
-              <a:rPr sz="1066">
-                <a:solidFill>
-                  <a:srgbClr val="262B36"/>
-                </a:solidFill>
-                <a:latin typeface="Consolas"/>
-                <a:ea typeface="Consolas"/>
-                <a:cs typeface="Consolas"/>
-              </a:rPr>
-              <a:t> </a:t>
-            </a:r>
-            <a:r>
-              <a:rPr sz="1066">
-                <a:solidFill>
-                  <a:srgbClr val="5C6574"/>
-                </a:solidFill>
-                <a:latin typeface="Consolas"/>
-                <a:ea typeface="Consolas"/>
-                <a:cs typeface="Consolas"/>
-              </a:rPr>
-              <a:t>{</a:t>
-            </a:r>
-            <a:r>
-              <a:rPr sz="1066">
-                <a:solidFill>
-                  <a:srgbClr val="262B36"/>
-                </a:solidFill>
-                <a:latin typeface="Consolas"/>
-                <a:ea typeface="Consolas"/>
-                <a:cs typeface="Consolas"/>
-              </a:rPr>
-              <a:t> success </a:t>
-            </a:r>
-            <a:r>
-              <a:rPr sz="1066">
-                <a:solidFill>
-                  <a:srgbClr val="5C6574"/>
-                </a:solidFill>
-                <a:latin typeface="Consolas"/>
-                <a:ea typeface="Consolas"/>
-                <a:cs typeface="Consolas"/>
-              </a:rPr>
-              <a:t>=</a:t>
-            </a:r>
-            <a:r>
-              <a:rPr sz="1066">
-                <a:solidFill>
-                  <a:srgbClr val="262B36"/>
-                </a:solidFill>
-                <a:latin typeface="Consolas"/>
-                <a:ea typeface="Consolas"/>
-                <a:cs typeface="Consolas"/>
-              </a:rPr>
-              <a:t> result</a:t>
-            </a:r>
-            <a:r>
-              <a:rPr sz="1066">
-                <a:solidFill>
-                  <a:srgbClr val="5C6574"/>
-                </a:solidFill>
-                <a:latin typeface="Consolas"/>
-                <a:ea typeface="Consolas"/>
-                <a:cs typeface="Consolas"/>
-              </a:rPr>
-              <a:t>.</a:t>
-            </a:r>
-            <a:r>
-              <a:rPr sz="1066" b="1">
-                <a:solidFill>
-                  <a:srgbClr val="7442C8"/>
-                </a:solidFill>
-                <a:latin typeface="Consolas"/>
-                <a:ea typeface="Consolas"/>
-                <a:cs typeface="Consolas"/>
-              </a:rPr>
-              <a:t>ExitCode</a:t>
+              <a:t>,</a:t>
             </a:r>
           </a:p>
           <a:p xmlns:a="http://schemas.openxmlformats.org/drawingml/2006/main">
@@ -11055,18 +11297,29 @@
                 <a:ea typeface="Consolas"/>
                 <a:cs typeface="Consolas"/>
               </a:rPr>
-              <a:t>      </a:t>
+              <a:t>    </a:t>
             </a:r>
             <a:r>
               <a:rPr sz="1066">
                 <a:solidFill>
+                  <a:srgbClr val="A95921"/>
+                </a:solidFill>
+                <a:latin typeface="Consolas"/>
+                <a:ea typeface="Consolas"/>
+                <a:cs typeface="Consolas"/>
+              </a:rPr>
+              <a:t>"--nologo"</a:t>
+            </a:r>
+            <a:r>
+              <a:rPr sz="1066">
+                <a:solidFill>
                   <a:srgbClr val="5C6574"/>
                 </a:solidFill>
                 <a:latin typeface="Consolas"/>
                 <a:ea typeface="Consolas"/>
                 <a:cs typeface="Consolas"/>
               </a:rPr>
-              <a:t>==</a:t>
+              <a:t>,</a:t>
             </a:r>
             <a:r>
               <a:rPr sz="1066">
@@ -11082,13 +11335,13 @@
             <a:r>
               <a:rPr sz="1066">
                 <a:solidFill>
-                  <a:srgbClr val="197373"/>
-                </a:solidFill>
-                <a:latin typeface="Consolas"/>
-                <a:ea typeface="Consolas"/>
-                <a:cs typeface="Consolas"/>
-              </a:rPr>
-              <a:t>0</a:t>
+                  <a:srgbClr val="A95921"/>
+                </a:solidFill>
+                <a:latin typeface="Consolas"/>
+                <a:ea typeface="Consolas"/>
+                <a:cs typeface="Consolas"/>
+              </a:rPr>
+              <a:t>"--verbosity"</a:t>
             </a:r>
             <a:r>
               <a:rPr sz="1066">
@@ -11110,51 +11363,29 @@
                 <a:ea typeface="Consolas"/>
                 <a:cs typeface="Consolas"/>
               </a:rPr>
-              <a:t> result</a:t>
+              <a:t> </a:t>
             </a:r>
             <a:r>
               <a:rPr sz="1066">
                 <a:solidFill>
+                  <a:srgbClr val="A95921"/>
+                </a:solidFill>
+                <a:latin typeface="Consolas"/>
+                <a:ea typeface="Consolas"/>
+                <a:cs typeface="Consolas"/>
+              </a:rPr>
+              <a:t>"minimal"</a:t>
+            </a:r>
+            <a:r>
+              <a:rPr sz="1066">
+                <a:solidFill>
                   <a:srgbClr val="5C6574"/>
                 </a:solidFill>
                 <a:latin typeface="Consolas"/>
                 <a:ea typeface="Consolas"/>
                 <a:cs typeface="Consolas"/>
               </a:rPr>
-              <a:t>.</a:t>
-            </a:r>
-            <a:r>
-              <a:rPr sz="1066" b="1">
-                <a:solidFill>
-                  <a:srgbClr val="7442C8"/>
-                </a:solidFill>
-                <a:latin typeface="Consolas"/>
-                <a:ea typeface="Consolas"/>
-                <a:cs typeface="Consolas"/>
-              </a:rPr>
-              <a:t>ExitCode</a:t>
-            </a:r>
-            <a:r>
-              <a:rPr sz="1066">
-                <a:solidFill>
-                  <a:srgbClr val="262B36"/>
-                </a:solidFill>
-                <a:latin typeface="Consolas"/>
-                <a:ea typeface="Consolas"/>
-                <a:cs typeface="Consolas"/>
-              </a:rPr>
-              <a:t> </a:t>
-            </a:r>
-            <a:r>
-              <a:rPr sz="1066">
-                <a:solidFill>
-                  <a:srgbClr val="5C6574"/>
-                </a:solidFill>
-                <a:latin typeface="Consolas"/>
-                <a:ea typeface="Consolas"/>
-                <a:cs typeface="Consolas"/>
-              </a:rPr>
-              <a:t>});</a:t>
+              <a:t>);</a:t>
             </a:r>
           </a:p>
           <a:p xmlns:a="http://schemas.openxmlformats.org/drawingml/2006/main">
@@ -11184,13 +11415,13 @@
             <a:r>
               <a:rPr sz="1066">
                 <a:solidFill>
-                  <a:srgbClr val="5C6574"/>
-                </a:solidFill>
-                <a:latin typeface="Consolas"/>
-                <a:ea typeface="Consolas"/>
-                <a:cs typeface="Consolas"/>
-              </a:rPr>
-              <a:t>}</a:t>
+                  <a:srgbClr val="55845A"/>
+                </a:solidFill>
+                <a:latin typeface="Consolas"/>
+                <a:ea typeface="Consolas"/>
+                <a:cs typeface="Consolas"/>
+              </a:rPr>
+              <a:t>// позивалац не може да направи нову команду</a:t>
             </a:r>
           </a:p>
         </p:txBody>
@@ -11707,7 +11938,7 @@
                 <a:ea typeface="Aptos Display"/>
                 <a:cs typeface="Aptos Display"/>
               </a:rPr>
-              <a:t>Текст пронађен у податку не сме добити ауторитет над AI_INSTRUCTIONS.md.</a:t>
+              <a:t>Текст пронађен у податку не сме добити ауторитет над AGENTS.md.</a:t>
             </a:r>
           </a:p>
         </p:txBody>
@@ -12951,7 +13182,7 @@
                 <a:ea typeface="Aptos"/>
                 <a:cs typeface="Aptos"/>
               </a:rPr>
-              <a:t>AI_INSTRUCTIONS има већи ауторитет.</a:t>
+              <a:t>AGENTS.md има већи ауторитет.</a:t>
             </a:r>
           </a:p>
           <a:p xmlns:a="http://schemas.openxmlformats.org/drawingml/2006/main">
@@ -15413,7 +15644,7 @@
                 <a:ea typeface="Aptos"/>
                 <a:cs typeface="Aptos"/>
               </a:rPr>
-              <a:t>Учитај project://instructions и project://readme.</a:t>
+              <a:t>Отворити пример у Kova и проверити покретање сервера ers.</a:t>
             </a:r>
           </a:p>
         </p:txBody>
@@ -20043,7 +20274,29 @@
                 <a:ea typeface="Consolas"/>
                 <a:cs typeface="Consolas"/>
               </a:rPr>
-              <a:t> builder </a:t>
+              <a:t> </a:t>
+            </a:r>
+            <a:r>
+              <a:rPr sz="1049">
+                <a:solidFill>
+                  <a:srgbClr val="262B36"/>
+                </a:solidFill>
+                <a:latin typeface="Consolas"/>
+                <a:ea typeface="Consolas"/>
+                <a:cs typeface="Consolas"/>
+              </a:rPr>
+              <a:t>builder</a:t>
+            </a:r>
+            <a:r>
+              <a:rPr sz="1049">
+                <a:solidFill>
+                  <a:srgbClr val="262B36"/>
+                </a:solidFill>
+                <a:latin typeface="Consolas"/>
+                <a:ea typeface="Consolas"/>
+                <a:cs typeface="Consolas"/>
+              </a:rPr>
+              <a:t> </a:t>
             </a:r>
             <a:r>
               <a:rPr sz="1049">
@@ -20233,7 +20486,18 @@
                 <a:ea typeface="Consolas"/>
                 <a:cs typeface="Consolas"/>
               </a:rPr>
-              <a:t>options </a:t>
+              <a:t>options</a:t>
+            </a:r>
+            <a:r>
+              <a:rPr sz="1049">
+                <a:solidFill>
+                  <a:srgbClr val="262B36"/>
+                </a:solidFill>
+                <a:latin typeface="Consolas"/>
+                <a:ea typeface="Consolas"/>
+                <a:cs typeface="Consolas"/>
+              </a:rPr>
+              <a:t> </a:t>
             </a:r>
             <a:r>
               <a:rPr sz="1049">
@@ -20280,7 +20544,18 @@
                 <a:ea typeface="Consolas"/>
                 <a:cs typeface="Consolas"/>
               </a:rPr>
-              <a:t>    options</a:t>
+              <a:t>    </a:t>
+            </a:r>
+            <a:r>
+              <a:rPr sz="1049">
+                <a:solidFill>
+                  <a:srgbClr val="262B36"/>
+                </a:solidFill>
+                <a:latin typeface="Consolas"/>
+                <a:ea typeface="Consolas"/>
+                <a:cs typeface="Consolas"/>
+              </a:rPr>
+              <a:t>options</a:t>
             </a:r>
             <a:r>
               <a:rPr sz="1049">
@@ -20432,26 +20707,59 @@
               <a:t> 5  </a:t>
             </a:r>
             <a:r>
+              <a:rPr sz="1049">
+                <a:solidFill>
+                  <a:srgbClr val="262B36"/>
+                </a:solidFill>
+                <a:latin typeface="Consolas"/>
+                <a:ea typeface="Consolas"/>
+                <a:cs typeface="Consolas"/>
+              </a:rPr>
+              <a:t>builder</a:t>
+            </a:r>
+            <a:r>
+              <a:rPr sz="1049">
+                <a:solidFill>
+                  <a:srgbClr val="5C6574"/>
+                </a:solidFill>
+                <a:latin typeface="Consolas"/>
+                <a:ea typeface="Consolas"/>
+                <a:cs typeface="Consolas"/>
+              </a:rPr>
+              <a:t>.</a:t>
+            </a:r>
+            <a:r>
               <a:rPr sz="1049" b="1">
                 <a:solidFill>
-                  <a:srgbClr val="005CC5"/>
-                </a:solidFill>
-                <a:latin typeface="Consolas"/>
-                <a:ea typeface="Consolas"/>
-                <a:cs typeface="Consolas"/>
-              </a:rPr>
-              <a:t>var</a:t>
+                  <a:srgbClr val="7442C8"/>
+                </a:solidFill>
+                <a:latin typeface="Consolas"/>
+                <a:ea typeface="Consolas"/>
+                <a:cs typeface="Consolas"/>
+              </a:rPr>
+              <a:t>Services</a:t>
             </a:r>
             <a:r>
               <a:rPr sz="1049">
                 <a:solidFill>
-                  <a:srgbClr val="262B36"/>
-                </a:solidFill>
-                <a:latin typeface="Consolas"/>
-                <a:ea typeface="Consolas"/>
-                <a:cs typeface="Consolas"/>
-              </a:rPr>
-              <a:t> projectRoot </a:t>
+                  <a:srgbClr val="5C6574"/>
+                </a:solidFill>
+                <a:latin typeface="Consolas"/>
+                <a:ea typeface="Consolas"/>
+                <a:cs typeface="Consolas"/>
+              </a:rPr>
+              <a:t>.</a:t>
+            </a:r>
+            <a:r>
+              <a:rPr sz="1049" b="1">
+                <a:solidFill>
+                  <a:srgbClr val="7442C8"/>
+                </a:solidFill>
+                <a:latin typeface="Consolas"/>
+                <a:ea typeface="Consolas"/>
+                <a:cs typeface="Consolas"/>
+              </a:rPr>
+              <a:t>AddProjectWorkspace</a:t>
             </a:r>
             <a:r>
               <a:rPr sz="1049">
@@ -20462,84 +20770,7 @@
                 <a:ea typeface="Consolas"/>
                 <a:cs typeface="Consolas"/>
               </a:rPr>
-              <a:t>=</a:t>
-            </a:r>
-            <a:r>
-              <a:rPr sz="1049">
-                <a:solidFill>
-                  <a:srgbClr val="262B36"/>
-                </a:solidFill>
-                <a:latin typeface="Consolas"/>
-                <a:ea typeface="Consolas"/>
-                <a:cs typeface="Consolas"/>
-              </a:rPr>
-              <a:t> </a:t>
-            </a:r>
-            <a:r>
-              <a:rPr sz="1049" b="1">
-                <a:solidFill>
-                  <a:srgbClr val="7442C8"/>
-                </a:solidFill>
-                <a:latin typeface="Consolas"/>
-                <a:ea typeface="Consolas"/>
-                <a:cs typeface="Consolas"/>
-              </a:rPr>
-              <a:t>ProjectRootLocator</a:t>
-            </a:r>
-            <a:r>
-              <a:rPr sz="1049">
-                <a:solidFill>
-                  <a:srgbClr val="5C6574"/>
-                </a:solidFill>
-                <a:latin typeface="Consolas"/>
-                <a:ea typeface="Consolas"/>
-                <a:cs typeface="Consolas"/>
-              </a:rPr>
-              <a:t>.</a:t>
-            </a:r>
-            <a:r>
-              <a:rPr sz="1049" b="1">
-                <a:solidFill>
-                  <a:srgbClr val="7442C8"/>
-                </a:solidFill>
-                <a:latin typeface="Consolas"/>
-                <a:ea typeface="Consolas"/>
-                <a:cs typeface="Consolas"/>
-              </a:rPr>
-              <a:t>Find</a:t>
-            </a:r>
-            <a:r>
-              <a:rPr sz="1049">
-                <a:solidFill>
-                  <a:srgbClr val="5C6574"/>
-                </a:solidFill>
-                <a:latin typeface="Consolas"/>
-                <a:ea typeface="Consolas"/>
-                <a:cs typeface="Consolas"/>
-              </a:rPr>
               <a:t>(</a:t>
-            </a:r>
-            <a:r>
-              <a:rPr sz="1049" b="1">
-                <a:solidFill>
-                  <a:srgbClr val="7442C8"/>
-                </a:solidFill>
-                <a:latin typeface="Consolas"/>
-                <a:ea typeface="Consolas"/>
-                <a:cs typeface="Consolas"/>
-              </a:rPr>
-              <a:t>Environment</a:t>
-            </a:r>
-            <a:r>
-              <a:rPr sz="1049">
-                <a:solidFill>
-                  <a:srgbClr val="5C6574"/>
-                </a:solidFill>
-                <a:latin typeface="Consolas"/>
-                <a:ea typeface="Consolas"/>
-                <a:cs typeface="Consolas"/>
-              </a:rPr>
-              <a:t>.</a:t>
             </a:r>
           </a:p>
           <a:p xmlns:a="http://schemas.openxmlformats.org/drawingml/2006/main">
@@ -20586,6 +20817,72 @@
                 <a:ea typeface="Consolas"/>
                 <a:cs typeface="Consolas"/>
               </a:rPr>
+              <a:t>ProjectRootLocator</a:t>
+            </a:r>
+            <a:r>
+              <a:rPr sz="1049">
+                <a:solidFill>
+                  <a:srgbClr val="5C6574"/>
+                </a:solidFill>
+                <a:latin typeface="Consolas"/>
+                <a:ea typeface="Consolas"/>
+                <a:cs typeface="Consolas"/>
+              </a:rPr>
+              <a:t>.</a:t>
+            </a:r>
+            <a:r>
+              <a:rPr sz="1049" b="1">
+                <a:solidFill>
+                  <a:srgbClr val="7442C8"/>
+                </a:solidFill>
+                <a:latin typeface="Consolas"/>
+                <a:ea typeface="Consolas"/>
+                <a:cs typeface="Consolas"/>
+              </a:rPr>
+              <a:t>Find</a:t>
+            </a:r>
+            <a:r>
+              <a:rPr sz="1049">
+                <a:solidFill>
+                  <a:srgbClr val="5C6574"/>
+                </a:solidFill>
+                <a:latin typeface="Consolas"/>
+                <a:ea typeface="Consolas"/>
+                <a:cs typeface="Consolas"/>
+              </a:rPr>
+              <a:t>(</a:t>
+            </a:r>
+            <a:r>
+              <a:rPr sz="1049" b="1">
+                <a:solidFill>
+                  <a:srgbClr val="7442C8"/>
+                </a:solidFill>
+                <a:latin typeface="Consolas"/>
+                <a:ea typeface="Consolas"/>
+                <a:cs typeface="Consolas"/>
+              </a:rPr>
+              <a:t>Environment</a:t>
+            </a:r>
+            <a:r>
+              <a:rPr sz="1049">
+                <a:solidFill>
+                  <a:srgbClr val="5C6574"/>
+                </a:solidFill>
+                <a:latin typeface="Consolas"/>
+                <a:ea typeface="Consolas"/>
+                <a:cs typeface="Consolas"/>
+              </a:rPr>
+              <a:t>.</a:t>
+            </a:r>
+            <a:r>
+              <a:rPr sz="1049" b="1">
+                <a:solidFill>
+                  <a:srgbClr val="7442C8"/>
+                </a:solidFill>
+                <a:latin typeface="Consolas"/>
+                <a:ea typeface="Consolas"/>
+                <a:cs typeface="Consolas"/>
+              </a:rPr>
               <a:t>CurrentDirectory</a:t>
             </a:r>
             <a:r>
@@ -20597,7 +20894,7 @@
                 <a:ea typeface="Consolas"/>
                 <a:cs typeface="Consolas"/>
               </a:rPr>
-              <a:t>);</a:t>
+              <a:t>));</a:t>
             </a:r>
           </a:p>
           <a:p xmlns:a="http://schemas.openxmlformats.org/drawingml/2006/main">
@@ -20624,116 +20921,6 @@
               </a:rPr>
               <a:t> 7  </a:t>
             </a:r>
-            <a:r>
-              <a:rPr sz="1049">
-                <a:solidFill>
-                  <a:srgbClr val="262B36"/>
-                </a:solidFill>
-                <a:latin typeface="Consolas"/>
-                <a:ea typeface="Consolas"/>
-                <a:cs typeface="Consolas"/>
-              </a:rPr>
-              <a:t>builder</a:t>
-            </a:r>
-            <a:r>
-              <a:rPr sz="1049">
-                <a:solidFill>
-                  <a:srgbClr val="5C6574"/>
-                </a:solidFill>
-                <a:latin typeface="Consolas"/>
-                <a:ea typeface="Consolas"/>
-                <a:cs typeface="Consolas"/>
-              </a:rPr>
-              <a:t>.</a:t>
-            </a:r>
-            <a:r>
-              <a:rPr sz="1049" b="1">
-                <a:solidFill>
-                  <a:srgbClr val="7442C8"/>
-                </a:solidFill>
-                <a:latin typeface="Consolas"/>
-                <a:ea typeface="Consolas"/>
-                <a:cs typeface="Consolas"/>
-              </a:rPr>
-              <a:t>Services</a:t>
-            </a:r>
-            <a:r>
-              <a:rPr sz="1049">
-                <a:solidFill>
-                  <a:srgbClr val="5C6574"/>
-                </a:solidFill>
-                <a:latin typeface="Consolas"/>
-                <a:ea typeface="Consolas"/>
-                <a:cs typeface="Consolas"/>
-              </a:rPr>
-              <a:t>.</a:t>
-            </a:r>
-            <a:r>
-              <a:rPr sz="1049" b="1">
-                <a:solidFill>
-                  <a:srgbClr val="7442C8"/>
-                </a:solidFill>
-                <a:latin typeface="Consolas"/>
-                <a:ea typeface="Consolas"/>
-                <a:cs typeface="Consolas"/>
-              </a:rPr>
-              <a:t>AddSingleton</a:t>
-            </a:r>
-            <a:r>
-              <a:rPr sz="1049">
-                <a:solidFill>
-                  <a:srgbClr val="5C6574"/>
-                </a:solidFill>
-                <a:latin typeface="Consolas"/>
-                <a:ea typeface="Consolas"/>
-                <a:cs typeface="Consolas"/>
-              </a:rPr>
-              <a:t>(</a:t>
-            </a:r>
-            <a:r>
-              <a:rPr sz="1049" b="1">
-                <a:solidFill>
-                  <a:srgbClr val="005CC5"/>
-                </a:solidFill>
-                <a:latin typeface="Consolas"/>
-                <a:ea typeface="Consolas"/>
-                <a:cs typeface="Consolas"/>
-              </a:rPr>
-              <a:t>new</a:t>
-            </a:r>
-            <a:r>
-              <a:rPr sz="1049">
-                <a:solidFill>
-                  <a:srgbClr val="262B36"/>
-                </a:solidFill>
-                <a:latin typeface="Consolas"/>
-                <a:ea typeface="Consolas"/>
-                <a:cs typeface="Consolas"/>
-              </a:rPr>
-              <a:t> </a:t>
-            </a:r>
-            <a:r>
-              <a:rPr sz="1049" b="1">
-                <a:solidFill>
-                  <a:srgbClr val="7442C8"/>
-                </a:solidFill>
-                <a:latin typeface="Consolas"/>
-                <a:ea typeface="Consolas"/>
-                <a:cs typeface="Consolas"/>
-              </a:rPr>
-              <a:t>ProjectWorkspace</a:t>
-            </a:r>
-            <a:r>
-              <a:rPr sz="1049">
-                <a:solidFill>
-                  <a:srgbClr val="5C6574"/>
-                </a:solidFill>
-                <a:latin typeface="Consolas"/>
-                <a:ea typeface="Consolas"/>
-                <a:cs typeface="Consolas"/>
-              </a:rPr>
-              <a:t>(</a:t>
-            </a:r>
           </a:p>
           <a:p xmlns:a="http://schemas.openxmlformats.org/drawingml/2006/main">
             <a:pPr>
@@ -20768,7 +20955,7 @@
                 <a:ea typeface="Consolas"/>
                 <a:cs typeface="Consolas"/>
               </a:rPr>
-              <a:t>    projectRoot</a:t>
+              <a:t>builder</a:t>
             </a:r>
             <a:r>
               <a:rPr sz="1049">
@@ -20779,7 +20966,18 @@
                 <a:ea typeface="Consolas"/>
                 <a:cs typeface="Consolas"/>
               </a:rPr>
-              <a:t>));</a:t>
+              <a:t>.</a:t>
+            </a:r>
+            <a:r>
+              <a:rPr sz="1049" b="1">
+                <a:solidFill>
+                  <a:srgbClr val="7442C8"/>
+                </a:solidFill>
+                <a:latin typeface="Consolas"/>
+                <a:ea typeface="Consolas"/>
+                <a:cs typeface="Consolas"/>
+              </a:rPr>
+              <a:t>Services</a:t>
             </a:r>
           </a:p>
           <a:p xmlns:a="http://schemas.openxmlformats.org/drawingml/2006/main">
@@ -20806,6 +21004,50 @@
               </a:rPr>
               <a:t> 9  </a:t>
             </a:r>
+            <a:r>
+              <a:rPr sz="1049">
+                <a:solidFill>
+                  <a:srgbClr val="262B36"/>
+                </a:solidFill>
+                <a:latin typeface="Consolas"/>
+                <a:ea typeface="Consolas"/>
+                <a:cs typeface="Consolas"/>
+              </a:rPr>
+              <a:t>    </a:t>
+            </a:r>
+            <a:r>
+              <a:rPr sz="1049">
+                <a:solidFill>
+                  <a:srgbClr val="5C6574"/>
+                </a:solidFill>
+                <a:latin typeface="Consolas"/>
+                <a:ea typeface="Consolas"/>
+                <a:cs typeface="Consolas"/>
+              </a:rPr>
+              <a:t>.</a:t>
+            </a:r>
+            <a:r>
+              <a:rPr sz="1049" b="1">
+                <a:solidFill>
+                  <a:srgbClr val="7442C8"/>
+                </a:solidFill>
+                <a:latin typeface="Consolas"/>
+                <a:ea typeface="Consolas"/>
+                <a:cs typeface="Consolas"/>
+              </a:rPr>
+              <a:t>AddMcpServer</a:t>
+            </a:r>
+            <a:r>
+              <a:rPr sz="1049">
+                <a:solidFill>
+                  <a:srgbClr val="5C6574"/>
+                </a:solidFill>
+                <a:latin typeface="Consolas"/>
+                <a:ea typeface="Consolas"/>
+                <a:cs typeface="Consolas"/>
+              </a:rPr>
+              <a:t>()</a:t>
+            </a:r>
           </a:p>
           <a:p xmlns:a="http://schemas.openxmlformats.org/drawingml/2006/main">
             <a:pPr>
@@ -20840,7 +21082,7 @@
                 <a:ea typeface="Consolas"/>
                 <a:cs typeface="Consolas"/>
               </a:rPr>
-              <a:t>builder</a:t>
+              <a:t>    </a:t>
             </a:r>
             <a:r>
               <a:rPr sz="1049">
@@ -20862,29 +21104,7 @@
                 <a:ea typeface="Consolas"/>
                 <a:cs typeface="Consolas"/>
               </a:rPr>
-              <a:t>Services</a:t>
-            </a:r>
-            <a:r>
-              <a:rPr sz="1049">
-                <a:solidFill>
-                  <a:srgbClr val="5C6574"/>
-                </a:solidFill>
-                <a:latin typeface="Consolas"/>
-                <a:ea typeface="Consolas"/>
-                <a:cs typeface="Consolas"/>
-              </a:rPr>
-              <a:t>.</a:t>
-            </a:r>
-            <a:r>
-              <a:rPr sz="1049" b="1">
-                <a:solidFill>
-                  <a:srgbClr val="7442C8"/>
-                </a:solidFill>
-                <a:latin typeface="Consolas"/>
-                <a:ea typeface="Consolas"/>
-                <a:cs typeface="Consolas"/>
-              </a:rPr>
-              <a:t>AddMcpServer</a:t>
+              <a:t>WithStdioServerTransport</a:t>
             </a:r>
             <a:r>
               <a:rPr sz="1049">
@@ -20953,7 +21173,7 @@
                 <a:ea typeface="Consolas"/>
                 <a:cs typeface="Consolas"/>
               </a:rPr>
-              <a:t>WithStdioServerTransport</a:t>
+              <a:t>WithToolsFromAssembly</a:t>
             </a:r>
             <a:r>
               <a:rPr sz="1049">
@@ -21022,7 +21242,7 @@
                 <a:ea typeface="Consolas"/>
                 <a:cs typeface="Consolas"/>
               </a:rPr>
-              <a:t>WithToolsFromAssembly</a:t>
+              <a:t>WithResourcesFromAssembly</a:t>
             </a:r>
             <a:r>
               <a:rPr sz="1049">
@@ -21033,7 +21253,7 @@
                 <a:ea typeface="Consolas"/>
                 <a:cs typeface="Consolas"/>
               </a:rPr>
-              <a:t>()</a:t>
+              <a:t>();</a:t>
             </a:r>
           </a:p>
           <a:p xmlns:a="http://schemas.openxmlformats.org/drawingml/2006/main">
@@ -21061,6 +21281,17 @@
               <a:t>13  </a:t>
             </a:r>
             <a:r>
+              <a:rPr sz="1049" b="1">
+                <a:solidFill>
+                  <a:srgbClr val="005CC5"/>
+                </a:solidFill>
+                <a:latin typeface="Consolas"/>
+                <a:ea typeface="Consolas"/>
+                <a:cs typeface="Consolas"/>
+              </a:rPr>
+              <a:t>await</a:t>
+            </a:r>
+            <a:r>
               <a:rPr sz="1049">
                 <a:solidFill>
                   <a:srgbClr val="262B36"/>
@@ -21069,11 +21300,22 @@
                 <a:ea typeface="Consolas"/>
                 <a:cs typeface="Consolas"/>
               </a:rPr>
-              <a:t>    </a:t>
+              <a:t> </a:t>
             </a:r>
             <a:r>
               <a:rPr sz="1049">
                 <a:solidFill>
+                  <a:srgbClr val="262B36"/>
+                </a:solidFill>
+                <a:latin typeface="Consolas"/>
+                <a:ea typeface="Consolas"/>
+                <a:cs typeface="Consolas"/>
+              </a:rPr>
+              <a:t>builder</a:t>
+            </a:r>
+            <a:r>
+              <a:rPr sz="1049">
+                <a:solidFill>
                   <a:srgbClr val="5C6574"/>
                 </a:solidFill>
                 <a:latin typeface="Consolas"/>
@@ -21091,7 +21333,29 @@
                 <a:ea typeface="Consolas"/>
                 <a:cs typeface="Consolas"/>
               </a:rPr>
-              <a:t>WithResourcesFromAssembly</a:t>
+              <a:t>Build</a:t>
+            </a:r>
+            <a:r>
+              <a:rPr sz="1049">
+                <a:solidFill>
+                  <a:srgbClr val="5C6574"/>
+                </a:solidFill>
+                <a:latin typeface="Consolas"/>
+                <a:ea typeface="Consolas"/>
+                <a:cs typeface="Consolas"/>
+              </a:rPr>
+              <a:t>().</a:t>
+            </a:r>
+            <a:r>
+              <a:rPr sz="1049" b="1">
+                <a:solidFill>
+                  <a:srgbClr val="7442C8"/>
+                </a:solidFill>
+                <a:latin typeface="Consolas"/>
+                <a:ea typeface="Consolas"/>
+                <a:cs typeface="Consolas"/>
+              </a:rPr>
+              <a:t>RunAsync</a:t>
             </a:r>
             <a:r>
               <a:rPr sz="1049">
@@ -22175,7 +22439,7 @@
                 <a:ea typeface="Aptos"/>
                 <a:cs typeface="Aptos"/>
               </a:rPr>
-              <a:t>Команда је део развојног окружења.</a:t>
+              <a:t>Kova покреће исту команду из .kova/mcp.json.</a:t>
             </a:r>
           </a:p>
           <a:p xmlns:a="http://schemas.openxmlformats.org/drawingml/2006/main">
@@ -23041,7 +23305,7 @@
                 <a:ea typeface="Aptos"/>
                 <a:cs typeface="Aptos"/>
               </a:rPr>
-              <a:t>Resource обезбеђује приступ садржају без извршавања операција.</a:t>
+              <a:t>Kova 0.3 користи само tools; resources чита MCP клијент који их подржава.</a:t>
             </a:r>
           </a:p>
         </p:txBody>
@@ -23676,15 +23940,92 @@
               <a:t> 1  </a:t>
             </a:r>
             <a:r>
+              <a:rPr sz="1049" b="1">
+                <a:solidFill>
+                  <a:srgbClr val="005CC5"/>
+                </a:solidFill>
+                <a:latin typeface="Consolas"/>
+                <a:ea typeface="Consolas"/>
+                <a:cs typeface="Consolas"/>
+              </a:rPr>
+              <a:t>public</a:t>
+            </a:r>
+            <a:r>
               <a:rPr sz="1049">
                 <a:solidFill>
+                  <a:srgbClr val="262B36"/>
+                </a:solidFill>
+                <a:latin typeface="Consolas"/>
+                <a:ea typeface="Consolas"/>
+                <a:cs typeface="Consolas"/>
+              </a:rPr>
+              <a:t> </a:t>
+            </a:r>
+            <a:r>
+              <a:rPr sz="1049" b="1">
+                <a:solidFill>
+                  <a:srgbClr val="005CC5"/>
+                </a:solidFill>
+                <a:latin typeface="Consolas"/>
+                <a:ea typeface="Consolas"/>
+                <a:cs typeface="Consolas"/>
+              </a:rPr>
+              <a:t>sealed</a:t>
+            </a:r>
+            <a:r>
+              <a:rPr sz="1049">
+                <a:solidFill>
+                  <a:srgbClr val="262B36"/>
+                </a:solidFill>
+                <a:latin typeface="Consolas"/>
+                <a:ea typeface="Consolas"/>
+                <a:cs typeface="Consolas"/>
+              </a:rPr>
+              <a:t> </a:t>
+            </a:r>
+            <a:r>
+              <a:rPr sz="1049" b="1">
+                <a:solidFill>
+                  <a:srgbClr val="005CC5"/>
+                </a:solidFill>
+                <a:latin typeface="Consolas"/>
+                <a:ea typeface="Consolas"/>
+                <a:cs typeface="Consolas"/>
+              </a:rPr>
+              <a:t>class</a:t>
+            </a:r>
+            <a:r>
+              <a:rPr sz="1049">
+                <a:solidFill>
+                  <a:srgbClr val="262B36"/>
+                </a:solidFill>
+                <a:latin typeface="Consolas"/>
+                <a:ea typeface="Consolas"/>
+                <a:cs typeface="Consolas"/>
+              </a:rPr>
+              <a:t> </a:t>
+            </a:r>
+            <a:r>
+              <a:rPr sz="1049" b="1">
+                <a:solidFill>
+                  <a:srgbClr val="7442C8"/>
+                </a:solidFill>
+                <a:latin typeface="Consolas"/>
+                <a:ea typeface="Consolas"/>
+                <a:cs typeface="Consolas"/>
+              </a:rPr>
+              <a:t>ProjectResources</a:t>
+            </a:r>
+            <a:r>
+              <a:rPr sz="1049">
+                <a:solidFill>
                   <a:srgbClr val="5C6574"/>
                 </a:solidFill>
                 <a:latin typeface="Consolas"/>
                 <a:ea typeface="Consolas"/>
                 <a:cs typeface="Consolas"/>
               </a:rPr>
-              <a:t>[</a:t>
+              <a:t>(</a:t>
             </a:r>
             <a:r>
               <a:rPr sz="1049" b="1">
@@ -23695,84 +24036,40 @@
                 <a:ea typeface="Consolas"/>
                 <a:cs typeface="Consolas"/>
               </a:rPr>
-              <a:t>McpServerResource</a:t>
+              <a:t>IProjectFileReader</a:t>
             </a:r>
             <a:r>
               <a:rPr sz="1049">
                 <a:solidFill>
+                  <a:srgbClr val="262B36"/>
+                </a:solidFill>
+                <a:latin typeface="Consolas"/>
+                <a:ea typeface="Consolas"/>
+                <a:cs typeface="Consolas"/>
+              </a:rPr>
+              <a:t> </a:t>
+            </a:r>
+            <a:r>
+              <a:rPr sz="1049">
+                <a:solidFill>
+                  <a:srgbClr val="262B36"/>
+                </a:solidFill>
+                <a:latin typeface="Consolas"/>
+                <a:ea typeface="Consolas"/>
+                <a:cs typeface="Consolas"/>
+              </a:rPr>
+              <a:t>files</a:t>
+            </a:r>
+            <a:r>
+              <a:rPr sz="1049">
+                <a:solidFill>
                   <a:srgbClr val="5C6574"/>
                 </a:solidFill>
                 <a:latin typeface="Consolas"/>
                 <a:ea typeface="Consolas"/>
                 <a:cs typeface="Consolas"/>
               </a:rPr>
-              <a:t>(</a:t>
-            </a:r>
-            <a:r>
-              <a:rPr sz="1049" b="1">
-                <a:solidFill>
-                  <a:srgbClr val="7442C8"/>
-                </a:solidFill>
-                <a:latin typeface="Consolas"/>
-                <a:ea typeface="Consolas"/>
-                <a:cs typeface="Consolas"/>
-              </a:rPr>
-              <a:t>UriTemplate</a:t>
-            </a:r>
-            <a:r>
-              <a:rPr sz="1049">
-                <a:solidFill>
-                  <a:srgbClr val="262B36"/>
-                </a:solidFill>
-                <a:latin typeface="Consolas"/>
-                <a:ea typeface="Consolas"/>
-                <a:cs typeface="Consolas"/>
-              </a:rPr>
-              <a:t> </a:t>
-            </a:r>
-            <a:r>
-              <a:rPr sz="1049">
-                <a:solidFill>
-                  <a:srgbClr val="5C6574"/>
-                </a:solidFill>
-                <a:latin typeface="Consolas"/>
-                <a:ea typeface="Consolas"/>
-                <a:cs typeface="Consolas"/>
-              </a:rPr>
-              <a:t>=</a:t>
-            </a:r>
-            <a:r>
-              <a:rPr sz="1049">
-                <a:solidFill>
-                  <a:srgbClr val="262B36"/>
-                </a:solidFill>
-                <a:latin typeface="Consolas"/>
-                <a:ea typeface="Consolas"/>
-                <a:cs typeface="Consolas"/>
-              </a:rPr>
-              <a:t> </a:t>
-            </a:r>
-            <a:r>
-              <a:rPr sz="1049">
-                <a:solidFill>
-                  <a:srgbClr val="A95921"/>
-                </a:solidFill>
-                <a:latin typeface="Consolas"/>
-                <a:ea typeface="Consolas"/>
-                <a:cs typeface="Consolas"/>
-              </a:rPr>
-              <a:t>"project://instructions"</a:t>
-            </a:r>
-            <a:r>
-              <a:rPr sz="1049">
-                <a:solidFill>
-                  <a:srgbClr val="5C6574"/>
-                </a:solidFill>
-                <a:latin typeface="Consolas"/>
-                <a:ea typeface="Consolas"/>
-                <a:cs typeface="Consolas"/>
-              </a:rPr>
-              <a:t>)]</a:t>
+              <a:t>)</a:t>
             </a:r>
           </a:p>
           <a:p xmlns:a="http://schemas.openxmlformats.org/drawingml/2006/main">
@@ -23802,13 +24099,13 @@
             <a:r>
               <a:rPr sz="1049">
                 <a:solidFill>
-                  <a:srgbClr val="262B36"/>
-                </a:solidFill>
-                <a:latin typeface="Consolas"/>
-                <a:ea typeface="Consolas"/>
-                <a:cs typeface="Consolas"/>
-              </a:rPr>
-              <a:t>    </a:t>
+                  <a:srgbClr val="5C6574"/>
+                </a:solidFill>
+                <a:latin typeface="Consolas"/>
+                <a:ea typeface="Consolas"/>
+                <a:cs typeface="Consolas"/>
+              </a:rPr>
+              <a:t>{</a:t>
             </a:r>
           </a:p>
           <a:p xmlns:a="http://schemas.openxmlformats.org/drawingml/2006/main">
@@ -23836,19 +24133,63 @@
               <a:t> 3  </a:t>
             </a:r>
             <a:r>
+              <a:rPr sz="1049">
+                <a:solidFill>
+                  <a:srgbClr val="262B36"/>
+                </a:solidFill>
+                <a:latin typeface="Consolas"/>
+                <a:ea typeface="Consolas"/>
+                <a:cs typeface="Consolas"/>
+              </a:rPr>
+              <a:t>  </a:t>
+            </a:r>
+            <a:r>
+              <a:rPr sz="1049">
+                <a:solidFill>
+                  <a:srgbClr val="5C6574"/>
+                </a:solidFill>
+                <a:latin typeface="Consolas"/>
+                <a:ea typeface="Consolas"/>
+                <a:cs typeface="Consolas"/>
+              </a:rPr>
+              <a:t>[</a:t>
+            </a:r>
+            <a:r>
               <a:rPr sz="1049" b="1">
                 <a:solidFill>
-                  <a:srgbClr val="005CC5"/>
-                </a:solidFill>
-                <a:latin typeface="Consolas"/>
-                <a:ea typeface="Consolas"/>
-                <a:cs typeface="Consolas"/>
-              </a:rPr>
-              <a:t>public</a:t>
+                  <a:srgbClr val="7442C8"/>
+                </a:solidFill>
+                <a:latin typeface="Consolas"/>
+                <a:ea typeface="Consolas"/>
+                <a:cs typeface="Consolas"/>
+              </a:rPr>
+              <a:t>McpServerResource</a:t>
             </a:r>
             <a:r>
               <a:rPr sz="1049">
                 <a:solidFill>
+                  <a:srgbClr val="5C6574"/>
+                </a:solidFill>
+                <a:latin typeface="Consolas"/>
+                <a:ea typeface="Consolas"/>
+                <a:cs typeface="Consolas"/>
+              </a:rPr>
+              <a:t>(</a:t>
+            </a:r>
+            <a:r>
+              <a:rPr sz="1049" b="1">
+                <a:solidFill>
+                  <a:srgbClr val="7442C8"/>
+                </a:solidFill>
+                <a:latin typeface="Consolas"/>
+                <a:ea typeface="Consolas"/>
+                <a:cs typeface="Consolas"/>
+              </a:rPr>
+              <a:t>UriTemplate</a:t>
+            </a:r>
+            <a:r>
+              <a:rPr sz="1049">
+                <a:solidFill>
                   <a:srgbClr val="262B36"/>
                 </a:solidFill>
                 <a:latin typeface="Consolas"/>
@@ -23858,19 +24199,19 @@
               <a:t> </a:t>
             </a:r>
             <a:r>
-              <a:rPr sz="1049" b="1">
-                <a:solidFill>
-                  <a:srgbClr val="005CC5"/>
-                </a:solidFill>
-                <a:latin typeface="Consolas"/>
-                <a:ea typeface="Consolas"/>
-                <a:cs typeface="Consolas"/>
-              </a:rPr>
-              <a:t>string</a:t>
-            </a:r>
-            <a:r>
               <a:rPr sz="1049">
                 <a:solidFill>
+                  <a:srgbClr val="5C6574"/>
+                </a:solidFill>
+                <a:latin typeface="Consolas"/>
+                <a:ea typeface="Consolas"/>
+                <a:cs typeface="Consolas"/>
+              </a:rPr>
+              <a:t>=</a:t>
+            </a:r>
+            <a:r>
+              <a:rPr sz="1049">
+                <a:solidFill>
                   <a:srgbClr val="262B36"/>
                 </a:solidFill>
                 <a:latin typeface="Consolas"/>
@@ -23880,48 +24221,26 @@
               <a:t> </a:t>
             </a:r>
             <a:r>
-              <a:rPr sz="1049" b="1">
-                <a:solidFill>
-                  <a:srgbClr val="7442C8"/>
-                </a:solidFill>
-                <a:latin typeface="Consolas"/>
-                <a:ea typeface="Consolas"/>
-                <a:cs typeface="Consolas"/>
-              </a:rPr>
-              <a:t>Instructions</a:t>
-            </a:r>
-            <a:r>
               <a:rPr sz="1049">
                 <a:solidFill>
+                  <a:srgbClr val="A95921"/>
+                </a:solidFill>
+                <a:latin typeface="Consolas"/>
+                <a:ea typeface="Consolas"/>
+                <a:cs typeface="Consolas"/>
+              </a:rPr>
+              <a:t>"project://instructions"</a:t>
+            </a:r>
+            <a:r>
+              <a:rPr sz="1049">
+                <a:solidFill>
                   <a:srgbClr val="5C6574"/>
                 </a:solidFill>
                 <a:latin typeface="Consolas"/>
                 <a:ea typeface="Consolas"/>
                 <a:cs typeface="Consolas"/>
               </a:rPr>
-              <a:t>()</a:t>
-            </a:r>
-            <a:r>
-              <a:rPr sz="1049">
-                <a:solidFill>
-                  <a:srgbClr val="262B36"/>
-                </a:solidFill>
-                <a:latin typeface="Consolas"/>
-                <a:ea typeface="Consolas"/>
-                <a:cs typeface="Consolas"/>
-              </a:rPr>
-              <a:t> </a:t>
-            </a:r>
-            <a:r>
-              <a:rPr sz="1049">
-                <a:solidFill>
-                  <a:srgbClr val="5C6574"/>
-                </a:solidFill>
-                <a:latin typeface="Consolas"/>
-                <a:ea typeface="Consolas"/>
-                <a:cs typeface="Consolas"/>
-              </a:rPr>
-              <a:t>=&gt;</a:t>
+              <a:t>)]</a:t>
             </a:r>
           </a:p>
           <a:p xmlns:a="http://schemas.openxmlformats.org/drawingml/2006/main">
@@ -23957,17 +24276,127 @@
                 <a:ea typeface="Consolas"/>
                 <a:cs typeface="Consolas"/>
               </a:rPr>
-              <a:t>    workspace</a:t>
+              <a:t>  </a:t>
+            </a:r>
+            <a:r>
+              <a:rPr sz="1049" b="1">
+                <a:solidFill>
+                  <a:srgbClr val="005CC5"/>
+                </a:solidFill>
+                <a:latin typeface="Consolas"/>
+                <a:ea typeface="Consolas"/>
+                <a:cs typeface="Consolas"/>
+              </a:rPr>
+              <a:t>public</a:t>
             </a:r>
             <a:r>
               <a:rPr sz="1049">
                 <a:solidFill>
+                  <a:srgbClr val="262B36"/>
+                </a:solidFill>
+                <a:latin typeface="Consolas"/>
+                <a:ea typeface="Consolas"/>
+                <a:cs typeface="Consolas"/>
+              </a:rPr>
+              <a:t> </a:t>
+            </a:r>
+            <a:r>
+              <a:rPr sz="1049" b="1">
+                <a:solidFill>
+                  <a:srgbClr val="005CC5"/>
+                </a:solidFill>
+                <a:latin typeface="Consolas"/>
+                <a:ea typeface="Consolas"/>
+                <a:cs typeface="Consolas"/>
+              </a:rPr>
+              <a:t>string</a:t>
+            </a:r>
+            <a:r>
+              <a:rPr sz="1049">
+                <a:solidFill>
+                  <a:srgbClr val="262B36"/>
+                </a:solidFill>
+                <a:latin typeface="Consolas"/>
+                <a:ea typeface="Consolas"/>
+                <a:cs typeface="Consolas"/>
+              </a:rPr>
+              <a:t> </a:t>
+            </a:r>
+            <a:r>
+              <a:rPr sz="1049" b="1">
+                <a:solidFill>
+                  <a:srgbClr val="7442C8"/>
+                </a:solidFill>
+                <a:latin typeface="Consolas"/>
+                <a:ea typeface="Consolas"/>
+                <a:cs typeface="Consolas"/>
+              </a:rPr>
+              <a:t>Instructions</a:t>
+            </a:r>
+            <a:r>
+              <a:rPr sz="1049">
+                <a:solidFill>
                   <a:srgbClr val="5C6574"/>
                 </a:solidFill>
                 <a:latin typeface="Consolas"/>
                 <a:ea typeface="Consolas"/>
                 <a:cs typeface="Consolas"/>
               </a:rPr>
+              <a:t>()</a:t>
+            </a:r>
+            <a:r>
+              <a:rPr sz="1049">
+                <a:solidFill>
+                  <a:srgbClr val="262B36"/>
+                </a:solidFill>
+                <a:latin typeface="Consolas"/>
+                <a:ea typeface="Consolas"/>
+                <a:cs typeface="Consolas"/>
+              </a:rPr>
+              <a:t> </a:t>
+            </a:r>
+            <a:r>
+              <a:rPr sz="1049">
+                <a:solidFill>
+                  <a:srgbClr val="5C6574"/>
+                </a:solidFill>
+                <a:latin typeface="Consolas"/>
+                <a:ea typeface="Consolas"/>
+                <a:cs typeface="Consolas"/>
+              </a:rPr>
+              <a:t>=&gt;</a:t>
+            </a:r>
+            <a:r>
+              <a:rPr sz="1049">
+                <a:solidFill>
+                  <a:srgbClr val="262B36"/>
+                </a:solidFill>
+                <a:latin typeface="Consolas"/>
+                <a:ea typeface="Consolas"/>
+                <a:cs typeface="Consolas"/>
+              </a:rPr>
+              <a:t> </a:t>
+            </a:r>
+            <a:r>
+              <a:rPr sz="1049">
+                <a:solidFill>
+                  <a:srgbClr val="262B36"/>
+                </a:solidFill>
+                <a:latin typeface="Consolas"/>
+                <a:ea typeface="Consolas"/>
+                <a:cs typeface="Consolas"/>
+              </a:rPr>
+              <a:t>files</a:t>
+            </a:r>
+            <a:r>
+              <a:rPr sz="1049">
+                <a:solidFill>
+                  <a:srgbClr val="5C6574"/>
+                </a:solidFill>
+                <a:latin typeface="Consolas"/>
+                <a:ea typeface="Consolas"/>
+                <a:cs typeface="Consolas"/>
+              </a:rPr>
               <a:t>.</a:t>
             </a:r>
             <a:r>
@@ -23979,7 +24408,7 @@
                 <a:ea typeface="Consolas"/>
                 <a:cs typeface="Consolas"/>
               </a:rPr>
-              <a:t>ReadProjectFile</a:t>
+              <a:t>ReadText</a:t>
             </a:r>
             <a:r>
               <a:rPr sz="1049">
@@ -24001,7 +24430,7 @@
                 <a:ea typeface="Consolas"/>
                 <a:cs typeface="Consolas"/>
               </a:rPr>
-              <a:t>".ai/AI_INSTRUCTIONS.md"</a:t>
+              <a:t>"AGENTS.md"</a:t>
             </a:r>
             <a:r>
               <a:rPr sz="1049">
@@ -24067,6 +24496,17 @@
             <a:r>
               <a:rPr sz="1049">
                 <a:solidFill>
+                  <a:srgbClr val="262B36"/>
+                </a:solidFill>
+                <a:latin typeface="Consolas"/>
+                <a:ea typeface="Consolas"/>
+                <a:cs typeface="Consolas"/>
+              </a:rPr>
+              <a:t>  </a:t>
+            </a:r>
+            <a:r>
+              <a:rPr sz="1049">
+                <a:solidFill>
                   <a:srgbClr val="5C6574"/>
                 </a:solidFill>
                 <a:latin typeface="Consolas"/>
@@ -24189,6 +24629,17 @@
               <a:t> 7  </a:t>
             </a:r>
             <a:r>
+              <a:rPr sz="1049">
+                <a:solidFill>
+                  <a:srgbClr val="262B36"/>
+                </a:solidFill>
+                <a:latin typeface="Consolas"/>
+                <a:ea typeface="Consolas"/>
+                <a:cs typeface="Consolas"/>
+              </a:rPr>
+              <a:t>  </a:t>
+            </a:r>
+            <a:r>
               <a:rPr sz="1049" b="1">
                 <a:solidFill>
                   <a:srgbClr val="005CC5"/>
@@ -24275,6 +24726,83 @@
                 <a:cs typeface="Consolas"/>
               </a:rPr>
               <a:t>=&gt;</a:t>
+            </a:r>
+            <a:r>
+              <a:rPr sz="1049">
+                <a:solidFill>
+                  <a:srgbClr val="262B36"/>
+                </a:solidFill>
+                <a:latin typeface="Consolas"/>
+                <a:ea typeface="Consolas"/>
+                <a:cs typeface="Consolas"/>
+              </a:rPr>
+              <a:t> </a:t>
+            </a:r>
+            <a:r>
+              <a:rPr sz="1049">
+                <a:solidFill>
+                  <a:srgbClr val="262B36"/>
+                </a:solidFill>
+                <a:latin typeface="Consolas"/>
+                <a:ea typeface="Consolas"/>
+                <a:cs typeface="Consolas"/>
+              </a:rPr>
+              <a:t>files</a:t>
+            </a:r>
+            <a:r>
+              <a:rPr sz="1049">
+                <a:solidFill>
+                  <a:srgbClr val="5C6574"/>
+                </a:solidFill>
+                <a:latin typeface="Consolas"/>
+                <a:ea typeface="Consolas"/>
+                <a:cs typeface="Consolas"/>
+              </a:rPr>
+              <a:t>.</a:t>
+            </a:r>
+            <a:r>
+              <a:rPr sz="1049" b="1">
+                <a:solidFill>
+                  <a:srgbClr val="7442C8"/>
+                </a:solidFill>
+                <a:latin typeface="Consolas"/>
+                <a:ea typeface="Consolas"/>
+                <a:cs typeface="Consolas"/>
+              </a:rPr>
+              <a:t>ReadText</a:t>
+            </a:r>
+            <a:r>
+              <a:rPr sz="1049">
+                <a:solidFill>
+                  <a:srgbClr val="5C6574"/>
+                </a:solidFill>
+                <a:latin typeface="Consolas"/>
+                <a:ea typeface="Consolas"/>
+                <a:cs typeface="Consolas"/>
+              </a:rPr>
+              <a:t>(</a:t>
+            </a:r>
+            <a:r>
+              <a:rPr sz="1049">
+                <a:solidFill>
+                  <a:srgbClr val="A95921"/>
+                </a:solidFill>
+                <a:latin typeface="Consolas"/>
+                <a:ea typeface="Consolas"/>
+                <a:cs typeface="Consolas"/>
+              </a:rPr>
+              <a:t>"README.md"</a:t>
+            </a:r>
+            <a:r>
+              <a:rPr sz="1049">
+                <a:solidFill>
+                  <a:srgbClr val="5C6574"/>
+                </a:solidFill>
+                <a:latin typeface="Consolas"/>
+                <a:ea typeface="Consolas"/>
+                <a:cs typeface="Consolas"/>
+              </a:rPr>
+              <a:t>);</a:t>
             </a:r>
           </a:p>
           <a:p xmlns:a="http://schemas.openxmlformats.org/drawingml/2006/main">
@@ -24304,68 +24832,13 @@
             <a:r>
               <a:rPr sz="1049">
                 <a:solidFill>
-                  <a:srgbClr val="262B36"/>
-                </a:solidFill>
-                <a:latin typeface="Consolas"/>
-                <a:ea typeface="Consolas"/>
-                <a:cs typeface="Consolas"/>
-              </a:rPr>
-              <a:t>    workspace</a:t>
-            </a:r>
-            <a:r>
-              <a:rPr sz="1049">
-                <a:solidFill>
                   <a:srgbClr val="5C6574"/>
                 </a:solidFill>
                 <a:latin typeface="Consolas"/>
                 <a:ea typeface="Consolas"/>
                 <a:cs typeface="Consolas"/>
               </a:rPr>
-              <a:t>.</a:t>
-            </a:r>
-            <a:r>
-              <a:rPr sz="1049" b="1">
-                <a:solidFill>
-                  <a:srgbClr val="7442C8"/>
-                </a:solidFill>
-                <a:latin typeface="Consolas"/>
-                <a:ea typeface="Consolas"/>
-                <a:cs typeface="Consolas"/>
-              </a:rPr>
-              <a:t>ReadProjectFile</a:t>
-            </a:r>
-            <a:r>
-              <a:rPr sz="1049">
-                <a:solidFill>
-                  <a:srgbClr val="5C6574"/>
-                </a:solidFill>
-                <a:latin typeface="Consolas"/>
-                <a:ea typeface="Consolas"/>
-                <a:cs typeface="Consolas"/>
-              </a:rPr>
-              <a:t>(</a:t>
-            </a:r>
-            <a:r>
-              <a:rPr sz="1049">
-                <a:solidFill>
-                  <a:srgbClr val="A95921"/>
-                </a:solidFill>
-                <a:latin typeface="Consolas"/>
-                <a:ea typeface="Consolas"/>
-                <a:cs typeface="Consolas"/>
-              </a:rPr>
-              <a:t>"README.md"</a:t>
-            </a:r>
-            <a:r>
-              <a:rPr sz="1049">
-                <a:solidFill>
-                  <a:srgbClr val="5C6574"/>
-                </a:solidFill>
-                <a:latin typeface="Consolas"/>
-                <a:ea typeface="Consolas"/>
-                <a:cs typeface="Consolas"/>
-              </a:rPr>
-              <a:t>);</a:t>
+              <a:t>}</a:t>
             </a:r>
           </a:p>
         </p:txBody>
@@ -26332,7 +26805,7 @@
                 <a:ea typeface="Aptos"/>
                 <a:cs typeface="Aptos"/>
               </a:rPr>
-              <a:t>Контролисан MCP дизајн захтева унапред дефинисану намену сваке операције.</a:t>
+              <a:t>У .kova/mcp.json поље toolRisks означава прегледане ReadOnly алате; остали траже одобрење.</a:t>
             </a:r>
           </a:p>
         </p:txBody>

--- a/01 Elementi Razvoja Softvera/02 Prezentacije/PPTX/07_MCP.pptx
+++ b/01 Elementi Razvoja Softvera/02 Prezentacije/PPTX/07_MCP.pptx
@@ -6163,62 +6163,6 @@
       </p:sp>
       <p:sp>
         <p:nvSpPr>
-          <p:cNvPr id="9" name="TextBox 8">
-            <a:extLst xmlns:a="http://schemas.openxmlformats.org/drawingml/2006/main">
-              <a:ext uri="{FF2B5EF4-FFF2-40B4-BE49-F238E27FC236}">
-                <a16:creationId xmlns:a16="http://schemas.microsoft.com/office/drawing/2014/main" id="{F3B23A8E-7244-4515-86CA-C4309F8BDDE2}"/>
-              </a:ext>
-            </a:extLst>
-          </p:cNvPr>
-          <p:cNvSpPr>
-            <a:spLocks xmlns:a="http://schemas.openxmlformats.org/drawingml/2006/main" noGrp="1"/>
-          </p:cNvSpPr>
-          <p:nvPr/>
-        </p:nvSpPr>
-        <p:spPr>
-          <a:xfrm xmlns:a="http://schemas.openxmlformats.org/drawingml/2006/main">
-            <a:off x="1078992" y="2240280"/>
-            <a:ext cx="1097280" cy="209855"/>
-          </a:xfrm>
-          <a:prstGeom xmlns:a="http://schemas.openxmlformats.org/drawingml/2006/main" prst="rect">
-            <a:avLst/>
-          </a:prstGeom>
-          <a:noFill xmlns:a="http://schemas.openxmlformats.org/drawingml/2006/main"/>
-        </p:spPr>
-        <p:txBody>
-          <a:bodyPr xmlns:a="http://schemas.openxmlformats.org/drawingml/2006/main" wrap="square" lIns="0" tIns="0" rIns="0" bIns="0" anchor="t">
-            <a:spAutoFit/>
-          </a:bodyPr>
-          <a:lstStyle xmlns:a="http://schemas.openxmlformats.org/drawingml/2006/main"/>
-          <a:p xmlns:a="http://schemas.openxmlformats.org/drawingml/2006/main">
-            <a:pPr algn="l">
-              <a:lnSpc>
-                <a:spcPct val="108000"/>
-              </a:lnSpc>
-              <a:spcBef>
-                <a:spcPts val="0"/>
-              </a:spcBef>
-              <a:spcAft>
-                <a:spcPts val="0"/>
-              </a:spcAft>
-              <a:buNone/>
-            </a:pPr>
-            <a:r>
-              <a:rPr sz="1275" b="1">
-                <a:solidFill>
-                  <a:srgbClr val="183B5B"/>
-                </a:solidFill>
-                <a:latin typeface="Aptos"/>
-                <a:ea typeface="Aptos"/>
-                <a:cs typeface="Aptos"/>
-              </a:rPr>
-              <a:t>КОД</a:t>
-            </a:r>
-          </a:p>
-        </p:txBody>
-      </p:sp>
-      <p:sp>
-        <p:nvSpPr>
           <p:cNvPr id="10" name="Oval 9">
             <a:extLst xmlns:a="http://schemas.openxmlformats.org/drawingml/2006/main">
               <a:ext uri="{FF2B5EF4-FFF2-40B4-BE49-F238E27FC236}">
@@ -9658,62 +9602,6 @@
       </p:sp>
       <p:sp>
         <p:nvSpPr>
-          <p:cNvPr id="9" name="TextBox 8">
-            <a:extLst xmlns:a="http://schemas.openxmlformats.org/drawingml/2006/main">
-              <a:ext uri="{FF2B5EF4-FFF2-40B4-BE49-F238E27FC236}">
-                <a16:creationId xmlns:a16="http://schemas.microsoft.com/office/drawing/2014/main" id="{84AAE765-DC41-405D-BD5B-5D6B402E8ABD}"/>
-              </a:ext>
-            </a:extLst>
-          </p:cNvPr>
-          <p:cNvSpPr>
-            <a:spLocks xmlns:a="http://schemas.openxmlformats.org/drawingml/2006/main" noGrp="1"/>
-          </p:cNvSpPr>
-          <p:nvPr/>
-        </p:nvSpPr>
-        <p:spPr>
-          <a:xfrm xmlns:a="http://schemas.openxmlformats.org/drawingml/2006/main">
-            <a:off x="1078992" y="2240280"/>
-            <a:ext cx="1097280" cy="209855"/>
-          </a:xfrm>
-          <a:prstGeom xmlns:a="http://schemas.openxmlformats.org/drawingml/2006/main" prst="rect">
-            <a:avLst/>
-          </a:prstGeom>
-          <a:noFill xmlns:a="http://schemas.openxmlformats.org/drawingml/2006/main"/>
-        </p:spPr>
-        <p:txBody>
-          <a:bodyPr xmlns:a="http://schemas.openxmlformats.org/drawingml/2006/main" wrap="square" lIns="0" tIns="0" rIns="0" bIns="0" anchor="t">
-            <a:spAutoFit/>
-          </a:bodyPr>
-          <a:lstStyle xmlns:a="http://schemas.openxmlformats.org/drawingml/2006/main"/>
-          <a:p xmlns:a="http://schemas.openxmlformats.org/drawingml/2006/main">
-            <a:pPr algn="l">
-              <a:lnSpc>
-                <a:spcPct val="108000"/>
-              </a:lnSpc>
-              <a:spcBef>
-                <a:spcPts val="0"/>
-              </a:spcBef>
-              <a:spcAft>
-                <a:spcPts val="0"/>
-              </a:spcAft>
-              <a:buNone/>
-            </a:pPr>
-            <a:r>
-              <a:rPr sz="1275" b="1">
-                <a:solidFill>
-                  <a:srgbClr val="183B5B"/>
-                </a:solidFill>
-                <a:latin typeface="Aptos"/>
-                <a:ea typeface="Aptos"/>
-                <a:cs typeface="Aptos"/>
-              </a:rPr>
-              <a:t>КОД</a:t>
-            </a:r>
-          </a:p>
-        </p:txBody>
-      </p:sp>
-      <p:sp>
-        <p:nvSpPr>
           <p:cNvPr id="10" name="Oval 9">
             <a:extLst xmlns:a="http://schemas.openxmlformats.org/drawingml/2006/main">
               <a:ext uri="{FF2B5EF4-FFF2-40B4-BE49-F238E27FC236}">
@@ -18672,7 +18560,7 @@
         <p:spPr>
           <a:xfrm xmlns:a="http://schemas.openxmlformats.org/drawingml/2006/main">
             <a:off x="3311652" y="2999232"/>
-            <a:ext cx="1353312" cy="209855"/>
+            <a:ext cx="1353312" cy="271577"/>
           </a:xfrm>
           <a:prstGeom xmlns:a="http://schemas.openxmlformats.org/drawingml/2006/main" prst="rect">
             <a:avLst/>
@@ -18698,9 +18586,9 @@
               <a:buNone/>
             </a:pPr>
             <a:r>
-              <a:rPr sz="1275" b="1">
-                <a:solidFill>
-                  <a:srgbClr val="183B5B"/>
+              <a:rPr sz="1650" b="1">
+                <a:solidFill>
+                  <a:srgbClr val="19222C"/>
                 </a:solidFill>
                 <a:latin typeface="Aptos"/>
                 <a:ea typeface="Aptos"/>
